--- a/it/slides/01-Architettura_dei_Calcolatori-PRG32_e_PRG32-QT_Installazione-Codice.pptx
+++ b/it/slides/01-Architettura_dei_Calcolatori-PRG32_e_PRG32-QT_Installazione-Codice.pptx
@@ -134,13 +134,13 @@
   <p:extLst>
     <p:ext uri="{521415D9-36F7-43E2-AB2F-B90AF26B5E84}">
       <p14:sectionLst xmlns:p14="http://schemas.microsoft.com/office/powerpoint/2010/main">
-        <p14:section name="Apertura" id="{c6b8970f-1c8d-5fc5-0746-9af61a986767}">
+        <p14:section name="Apertura" id="{927fcf9b-aa5a-d59f-542a-d14d55245505}">
           <p14:sldIdLst>
             <p14:sldId id="256"/>
             <p14:sldId id="257"/>
           </p14:sldIdLst>
         </p14:section>
-        <p14:section name="I listati" id="{52760ce0-45d5-c3f0-1b2d-c13e7158e7e9}">
+        <p14:section name="Passo 1: installare PRG32-QT" id="{c44c9c48-3103-6748-930d-08b150b1c189}">
           <p14:sldIdLst>
             <p14:sldId id="258"/>
             <p14:sldId id="259"/>
@@ -148,27 +148,39 @@
             <p14:sldId id="261"/>
             <p14:sldId id="262"/>
             <p14:sldId id="263"/>
+          </p14:sldIdLst>
+        </p14:section>
+        <p14:section name="Passo 2: installare la toolchain" id="{50e8d51a-5d30-3405-970c-b63a9937c23b}">
+          <p14:sldIdLst>
             <p14:sldId id="264"/>
             <p14:sldId id="265"/>
             <p14:sldId id="266"/>
             <p14:sldId id="267"/>
             <p14:sldId id="268"/>
+          </p14:sldIdLst>
+        </p14:section>
+        <p14:section name="Passo 3: la prima compilazione" id="{aab94bd3-73b7-6595-8ba4-95f515b194ac}">
+          <p14:sldIdLst>
             <p14:sldId id="269"/>
             <p14:sldId id="270"/>
             <p14:sldId id="271"/>
             <p14:sldId id="272"/>
+          </p14:sldIdLst>
+        </p14:section>
+        <p14:section name="Facoltativo: QEMU e il kit" id="{4dffeb2b-058a-89c3-4bf8-7f6f71672f97}">
+          <p14:sldIdLst>
             <p14:sldId id="273"/>
             <p14:sldId id="274"/>
           </p14:sldIdLst>
         </p14:section>
-        <p14:section name="Il programma completo" id="{141a815b-2a9f-2c11-3b70-4190163c5715}">
+        <p14:section name="Il programma completo" id="{d17ac755-11e3-c132-6c05-12de5976e422}">
           <p14:sldIdLst>
             <p14:sldId id="275"/>
             <p14:sldId id="276"/>
             <p14:sldId id="277"/>
           </p14:sldIdLst>
         </p14:section>
-        <p14:section name="Eseguire e provare" id="{1983ebe0-55b0-f463-e6e7-69a5f7a721a3}">
+        <p14:section name="Eseguire e provare" id="{88a552ac-4ab8-f4b4-9e1f-4e02f9fa3768}">
           <p14:sldIdLst>
             <p14:sldId id="278"/>
             <p14:sldId id="279"/>
@@ -177,7 +189,7 @@
             <p14:sldId id="282"/>
           </p14:sldIdLst>
         </p14:section>
-        <p14:section name="Esercizi" id="{c588c12e-b10d-0c7e-1000-3847c0809bf8}">
+        <p14:section name="Esercizi" id="{b9d170c4-0a65-1641-f12d-1a144268976a}">
           <p14:sldIdLst>
             <p14:sldId id="283"/>
           </p14:sldIdLst>
@@ -3963,7 +3975,63 @@
       </p:sp>
       <p:sp>
         <p:nvSpPr>
-          <p:cNvPr id="11" name="Shape 9"/>
+          <p:cNvPr id="11" name="Text 9"/>
+          <p:cNvSpPr txBox="1"/>
+          <p:nvPr/>
+        </p:nvSpPr>
+        <p:spPr>
+          <a:xfrm>
+            <a:off x="4693615" y="566928"/>
+            <a:ext cx="6949440" cy="640080"/>
+          </a:xfrm>
+          <a:prstGeom prst="rect">
+            <a:avLst/>
+          </a:prstGeom>
+          <a:noFill/>
+          <a:ln/>
+        </p:spPr>
+        <p:txBody>
+          <a:bodyPr wrap="square" lIns="0" tIns="0" rIns="0" bIns="0" rtlCol="0" anchor="t"/>
+          <a:lstStyle/>
+          <a:p>
+            <a:pPr algn="r" indent="0" marL="0">
+              <a:buNone/>
+            </a:pPr>
+            <a:r>
+              <a:rPr lang="en-US" sz="1300" dirty="0">
+                <a:solidFill>
+                  <a:srgbClr val="CFE3EA"/>
+                </a:solidFill>
+                <a:latin typeface="Calibri" pitchFamily="34" charset="0"/>
+                <a:ea typeface="Calibri" pitchFamily="34" charset="-122"/>
+                <a:cs typeface="Calibri" pitchFamily="34" charset="-120"/>
+              </a:rPr>
+              <a:t>Presentazione del codice. I concetti, le figure e le domande sono nella presentazione della lezione:</a:t>
+            </a:r>
+            <a:endParaRPr lang="en-US" sz="1300" dirty="0"/>
+          </a:p>
+          <a:p>
+            <a:pPr algn="r" indent="0" marL="0">
+              <a:buNone/>
+            </a:pPr>
+            <a:r>
+              <a:rPr lang="en-US" sz="1300" dirty="0">
+                <a:solidFill>
+                  <a:srgbClr val="CFE3EA"/>
+                </a:solidFill>
+                <a:latin typeface="Calibri" pitchFamily="34" charset="0"/>
+                <a:ea typeface="Calibri" pitchFamily="34" charset="-122"/>
+                <a:cs typeface="Calibri" pitchFamily="34" charset="-120"/>
+              </a:rPr>
+              <a:t>01-Architettura_dei_Calcolatori-PRG32_e_PRG32-QT_Installazione.pptx</a:t>
+            </a:r>
+            <a:endParaRPr lang="en-US" sz="1300" dirty="0"/>
+          </a:p>
+        </p:txBody>
+      </p:sp>
+      <p:sp>
+        <p:nvSpPr>
+          <p:cNvPr id="12" name="Shape 10"/>
           <p:cNvSpPr/>
           <p:nvPr/>
         </p:nvSpPr>
@@ -3990,7 +4058,7 @@
       </p:sp>
       <p:pic>
         <p:nvPicPr>
-          <p:cNvPr id="12" name="Image 0" descr="/Users/raffaelemontella/devel/riscv-prg32/computer-architecture-with-prg32/tools/assets/prg32qt_debugger.png">    </p:cNvPr>
+          <p:cNvPr id="13" name="Image 0" descr="/Users/raffaelemontella/devel/riscv-prg32/computer-architecture-with-prg32/tools/assets/prg32qt_debugger.png">    </p:cNvPr>
           <p:cNvPicPr>
             <a:picLocks noChangeAspect="1"/>
           </p:cNvPicPr>

--- a/it/slides/01-Architettura_dei_Calcolatori-PRG32_e_PRG32-QT_Installazione-Codice.pptx
+++ b/it/slides/01-Architettura_dei_Calcolatori-PRG32_e_PRG32-QT_Installazione-Codice.pptx
@@ -134,13 +134,13 @@
   <p:extLst>
     <p:ext uri="{521415D9-36F7-43E2-AB2F-B90AF26B5E84}">
       <p14:sectionLst xmlns:p14="http://schemas.microsoft.com/office/powerpoint/2010/main">
-        <p14:section name="Apertura" id="{927fcf9b-aa5a-d59f-542a-d14d55245505}">
+        <p14:section name="Apertura" id="{188c6a4e-5e7a-24fa-14b2-a57741a54588}">
           <p14:sldIdLst>
             <p14:sldId id="256"/>
             <p14:sldId id="257"/>
           </p14:sldIdLst>
         </p14:section>
-        <p14:section name="Passo 1: installare PRG32-QT" id="{c44c9c48-3103-6748-930d-08b150b1c189}">
+        <p14:section name="Passo 1: installare PRG32-QT" id="{e9b8a92e-c865-f205-277d-493639713d7d}">
           <p14:sldIdLst>
             <p14:sldId id="258"/>
             <p14:sldId id="259"/>
@@ -150,7 +150,7 @@
             <p14:sldId id="263"/>
           </p14:sldIdLst>
         </p14:section>
-        <p14:section name="Passo 2: installare la toolchain" id="{50e8d51a-5d30-3405-970c-b63a9937c23b}">
+        <p14:section name="Passo 2: installare la toolchain" id="{71d3371b-08c4-b698-0d1d-95e0fb19e6ce}">
           <p14:sldIdLst>
             <p14:sldId id="264"/>
             <p14:sldId id="265"/>
@@ -159,7 +159,7 @@
             <p14:sldId id="268"/>
           </p14:sldIdLst>
         </p14:section>
-        <p14:section name="Passo 3: la prima compilazione" id="{aab94bd3-73b7-6595-8ba4-95f515b194ac}">
+        <p14:section name="Passo 3: la prima compilazione" id="{7d2f341b-76c4-36be-d017-9769ecfeca30}">
           <p14:sldIdLst>
             <p14:sldId id="269"/>
             <p14:sldId id="270"/>
@@ -167,20 +167,20 @@
             <p14:sldId id="272"/>
           </p14:sldIdLst>
         </p14:section>
-        <p14:section name="Facoltativo: QEMU e il kit" id="{4dffeb2b-058a-89c3-4bf8-7f6f71672f97}">
+        <p14:section name="Facoltativo: QEMU e il kit" id="{bec5aade-6fa2-9124-b00a-d49ec4edddaf}">
           <p14:sldIdLst>
             <p14:sldId id="273"/>
             <p14:sldId id="274"/>
           </p14:sldIdLst>
         </p14:section>
-        <p14:section name="Il programma completo" id="{d17ac755-11e3-c132-6c05-12de5976e422}">
+        <p14:section name="Il programma completo" id="{b946f346-f83f-0df4-6bde-6fe9891c2092}">
           <p14:sldIdLst>
             <p14:sldId id="275"/>
             <p14:sldId id="276"/>
             <p14:sldId id="277"/>
           </p14:sldIdLst>
         </p14:section>
-        <p14:section name="Eseguire e provare" id="{88a552ac-4ab8-f4b4-9e1f-4e02f9fa3768}">
+        <p14:section name="Eseguire e provare" id="{d55449ed-c0be-578c-a392-44da7cbe96c8}">
           <p14:sldIdLst>
             <p14:sldId id="278"/>
             <p14:sldId id="279"/>
@@ -189,7 +189,7 @@
             <p14:sldId id="282"/>
           </p14:sldIdLst>
         </p14:section>
-        <p14:section name="Esercizi" id="{b9d170c4-0a65-1641-f12d-1a144268976a}">
+        <p14:section name="Esercizi" id="{487ac7ec-ae8c-97eb-580f-5776e22df470}">
           <p14:sldIdLst>
             <p14:sldId id="283"/>
           </p14:sldIdLst>
@@ -598,7 +598,9 @@
           <a:p>
             <a:r>
               <a:rPr lang="en-US" dirty="0"/>
-              <a:t>Questa è la presentazione del codice della Lezione 01. La presentazione della lezione contiene i concetti; questa contiene tutto ciò che si scrive e si esegue: i listati con la loro spiegazione, il programma completo, che cosa mostra, e il modo di provarlo su ciascuno dei tre host.</a:t>
+              <a:t>Questa è la presentazione del codice della Lezione 01. La presentazione della lezione contiene i concetti; questa contiene tutto ciò che si scrive e si esegue: i listati con la loro spiegazione, il programma completo, che cosa mostra, e il modo di provarlo su ciascuno dei tre host.
+Stato di apprendimento: DA COMPRENDERE OGGI, alla fine di questa lezione lo spiegate, lo seguite passo passo e lo applicate da soli; DA UTILIZZARE OGGI, oggi seguite e usate la ricetta; come funziona dentro si spiega più avanti, o non fa parte del corso; DA COMPRENDERE PIÙ AVANTI, riconoscete il nome e lo scopo; lo spiega una lezione successiva. Una slide senza etichetta è contesto: una storia, un esempio, una domanda, un esercizio.
+Stato di apprendimento di questa lezione. DA COMPRENDERE OGGI: i componenti di PRG32. DA UTILIZZARE OGGI: gli strumenti di PRG32, il debugger di PRG32-QT, il programma completo (si usa, non si studia, in questo corso). DA COMPRENDERE PIÙ AVANTI: contratto init/update/draw (Lezione 02); i registri (Lezione 02). Una slide senza etichetta è contesto: una storia, un esempio, una domanda, un esercizio.</a:t>
             </a:r>
             <a:endParaRPr lang="en-US" dirty="0"/>
           </a:p>
@@ -687,6 +689,7 @@
             <a:r>
               <a:rPr lang="en-US" dirty="0"/>
               <a:t>Su macOS i blocchi sono tre. Homebrew installa i prerequisiti. Poi si clona ESP-IDF e install.sh scarica i compilatori per i due chip: abbiate pazienza, è la parte lunga. La riga . ./export.sh comincia con un punto e uno spazio, e il punto conta: fa sì che lo script modifichi il terminale in cui siete, invece di una copia che scompare. L'ultimo blocco clona PRG32 ed esegue il doctor. Gli stessi comandi funzionano su Apple Silicon e su Intel.
+DA UTILIZZARE OGGI: gli strumenti di PRG32 (si usa, non si studia, in questo corso).
 Per il docente: Dal README di PRG32. git può chiedere prima di installare gli strumenti da riga di comando di Xcode: accettate. Il clone ricorsivo e install.sh scaricano qualche gigabyte.</a:t>
             </a:r>
             <a:endParaRPr lang="en-US" dirty="0"/>
@@ -776,6 +779,7 @@
             <a:r>
               <a:rPr lang="en-US" dirty="0"/>
               <a:t>Su Debian e Ubuntu il primo blocco è un unico lungo comando apt, spezzato su tre righe dalle barre rovesciate: copiatelo intero. I passi 2 e 3 sono identici a quelli di macOS. Sulle altre distribuzioni i pacchetti sono gli stessi, con altri nomi. L'ultima nota riguarda solo chi ha un kit: il vostro utente deve appartenere al gruppo dialout per raggiungere la porta seriale della scheda, e bisogna uscire dalla sessione e rientrare perché la modifica abbia effetto.
+DA UTILIZZARE OGGI: gli strumenti di PRG32 (si usa, non si studia, in questo corso).
 Per il docente: Dal README di PRG32. Il gruppo dialout dà accesso alla porta seriale della scheda: dopo il comando uscite dalla sessione e rientrate. Non serve per PRG32-QT né per QEMU.</a:t>
             </a:r>
             <a:endParaRPr lang="en-US" dirty="0"/>
@@ -865,6 +869,7 @@
             <a:r>
               <a:rPr lang="en-US" dirty="0"/>
               <a:t>Questa slide è la routine quotidiana, e previene l'errore più comune delle prime settimane. In ogni nuovo terminale, prima di ogni altra cosa, attivate ESP-IDF con export.sh e spostatevi nella cartella PRG32. Due alias risparmiano battute: get_idf attiva, prg sta per python3 -m prg32. Su Windows, aprire ESP-IDF PowerShell fa lo stesso. Provate una volta di proposito: aprite un nuovo terminale, eseguite il doctor senza attivare, e leggete l'errore. Avendolo visto qui, più avanti lo riconoscerete subito.
+DA UTILIZZARE OGGI: gli strumenti di PRG32 (si usa, non si studia, in questo corso).
 Per il docente: L'errore più comune delle prime settimane. Far chiudere il terminale agli studenti, aprirne uno nuovo ed eseguire doctor senza attivare: devono vedere l'errore una volta, qui, e non durante un tutorial.</a:t>
             </a:r>
             <a:endParaRPr lang="en-US" dirty="0"/>
@@ -954,6 +959,7 @@
             <a:r>
               <a:rPr lang="en-US" dirty="0"/>
               <a:t>Il doctor controlla l'installazione e stampa una riga per ogni controllo. [OK] idf.py found significa che ESP-IDF è attivo. [OK] riscv32-esp-elf-gcc found significa che il compilatore RISC-V è raggiungibile. Le righe sulle partizioni significano che la cartella PRG32 è completa. Una riga che comincia con [ERROR] dice che cosa non va e che cosa fare: leggetela fino in fondo prima di chiedere aiuto. Quando tutte le righe sono OK, il livello 2 è fatto. Le ultime righe del listato mostrano l'errore che si ottiene in un terminale dove ESP-IDF non è attivo.
+DA UTILIZZARE OGGI: gli strumenti di PRG32 (si usa, non si studia, in questo corso).
 Per il docente: Messaggi del doctor di ottobre 2026. I quattro slot per le cartucce, da cart0 a cart3, sono regioni della memoria flash della scheda: 131072 byte ciascuno. Se doctor passa, il livello 2 è fatto.</a:t>
             </a:r>
             <a:endParaRPr lang="en-US" dirty="0"/>
@@ -1043,6 +1049,7 @@
             <a:r>
               <a:rPr lang="en-US" dirty="0"/>
               <a:t>Il comando cartridge build prende un file sorgente e scrive un file .prg32. Tre opzioni meritano di essere capite. --entry-prefix pong_c è il nome che nel sorgente precede _init, _update e _draw. --portable produce una cartuccia che gira su ogni host, non su una sola immagine del firmware. --out dà il nome al risultato. Lo strumento risponde con la dimensione del codice: un intero Pong sono circa tremila byte. Qui il sorgente è in C, preso dagli esempi, così provate il compilatore senza scrivere un programma.
+DA UTILIZZARE OGGI: gli strumenti di PRG32 (si usa, non si studia, in questo corso). DA COMPRENDERE PIÙ AVANTI: contratto init/update/draw (si studia nella Lezione 02).
 Per il docente: Pong in C dagli esempi del repository: dimostra che il compilatore funziona senza dover scrivere un programma. Nella Lezione 02 il sorgente è vostro, in assembly, e il comando è lo stesso. Su Windows scrivete python e mettete il comando su una riga sola.</a:t>
             </a:r>
             <a:endParaRPr lang="en-US" dirty="0"/>
@@ -1132,6 +1139,7 @@
             <a:r>
               <a:rPr lang="en-US" dirty="0"/>
               <a:t>PRG32-QT deve essere in esecuzione. Il primo comando, runtime, gli chiede il suo stato: se risponde, la connessione funziona. Il secondo, upload-and-run, memorizza la cartuccia nello slot cart0 e la avvia; il gioco compare nella finestra di PRG32-QT. Il comando dice esp32c6 perché, per lo strumento, PRG32-QT si comporta come una scheda che ascolta sulla porta 8080. Lo stesso comando con l'indirizzo di una scheda vera, http://192.168.4.1, manda il gioco lì. Senza gli strumenti si può anche importare il file dal menu di PRG32-QT.
+DA UTILIZZARE OGGI: gli strumenti di PRG32 (si usa, non si studia, in questo corso).
 Per il docente: Eseguito per queste slide su macOS. Se localhost non risponde, leggete l'indirizzo sulla schermata Setup di PRG32-QT e usate quello. Senza gli strumenti: in PRG32-QT importate il file pong.prg32 e scegliete Run Cartridge. Lo stesso comando con --url http://192.168.4.1 invia il gioco a una scheda vera.</a:t>
             </a:r>
             <a:endParaRPr lang="en-US" dirty="0"/>
@@ -1221,6 +1229,7 @@
             <a:r>
               <a:rPr lang="en-US" dirty="0"/>
               <a:t>Ora aprite la macchina. In Settings attivate Run cartridges in RISC-V debug mode ed eseguite di nuovo la cartuccia: il gioco è a sinistra, la macchina a destra. Pausa: è evidenziata un'istruzione, la prossima a essere eseguita. Qualche passo: l'evidenziazione si sposta e alcuni registri cambiano. Update e Draw mostrano quelle due funzioni della cartuccia. Riprendete, poi abbassate la velocità e guardate il gioco al rallentatore. Oggi non ci si aspetta che capiate i registri; conta che il debugger si apra e obbedisca.
+DA UTILIZZARE OGGI: il debugger di PRG32-QT (si usa, non si studia, in questo corso). DA COMPRENDERE PIÙ AVANTI: i registri (si studia nella Lezione 02).
 Per il docente: Solo un primo sguardo: la Lezione 02 spiega che cosa sono i registri. Oggi conta che il debugger si apra e risponda. La modalità debug resta attiva finché non la si disattiva. Pausa, ripresa e passo sono i tre pulsanti di trasporto del debugger, disegnati come in un lettore video: due barre, un triangolo, un triangolo con una barra. Le slide e i tutorial li chiamano Pause, Resume e Step.</a:t>
             </a:r>
             <a:endParaRPr lang="en-US" dirty="0"/>
@@ -1310,6 +1319,7 @@
             <a:r>
               <a:rPr lang="en-US" dirty="0"/>
               <a:t>Ecco che cosa dovreste vedere: a destra il listato in assembly con l'istruzione corrente evidenziata, i trentadue registri, una finestra sulla memoria e i contatori del frame. Ogni elemento di questa immagine sarà spiegato nelle prossime lezioni, a cominciare dai registri nella Lezione 02. Se vedete questa schermata con una cartuccia compilata da voi, la vostra officina è completa.
+DA UTILIZZARE OGGI: il debugger di PRG32-QT (si usa, non si studia, in questo corso). DA COMPRENDERE PIÙ AVANTI: i registri (si studia nella Lezione 02).
 Per il docente: Dalla documentazione di PRG32-QT.</a:t>
             </a:r>
             <a:endParaRPr lang="en-US" dirty="0"/>
@@ -1399,6 +1409,7 @@
             <a:r>
               <a:rPr lang="en-US" dirty="0"/>
               <a:t>Il livello 3 ha tre parti: le librerie che servono all'emulatore per la sua finestra, l'emulatore stesso, e tre comandi dello strumento. qemu build compila l'intero firmware, e la prima volta richiede diversi minuti. qemu upload copia una cartuccia nell'immagine della flash, e QEMU deve essere chiuso mentre lo si esegue. qemu run avvia l'emulatore, che si apre sul menu Setup: scegliete Run Cartridge e poi cart0. Ricordate di scrivere nel terminale, non nella finestra con l'immagine.
+DA UTILIZZARE OGGI: gli strumenti di PRG32 (si usa, non si studia, in questo corso).
 Per il docente: Dal README e da docs/usage/qemu.md di PRG32. Non eseguito per queste slide. La prima compilazione scarica componenti e compila l'intero firmware. Se upload fallisce, eseguite QEMU una volta perché esista l'immagine della flash, chiudetelo e ripetete. Da ottobre 2026 il firmware parte in modo predefinito dal menu Setup, su QEMU e sulla scheda: scegliete Run Cartridge, poi lo slot. I tasti vanno al terminale che ha lanciato QEMU, non alla finestra con l'immagine.</a:t>
             </a:r>
             <a:endParaRPr lang="en-US" dirty="0"/>
@@ -1488,6 +1499,7 @@
             <a:r>
               <a:rPr lang="en-US" dirty="0"/>
               <a:t>Il livello 4 è la scheda. Collegata via USB, build-and-flash compila il firmware e lo scrive nel chip: una volta per scheda. La scheda parte poi dal menu Setup e crea una rete Wi-Fi chiamata PRG32. Collegatevi, e il comando di caricamento che già conoscete funziona con l'indirizzo 192.168.4.1: da quel momento, niente cavi. L'ultimo comando fa invece entrare la scheda in una rete esistente. Su Linux il vostro utente deve stare nel gruppo dialout.
+DA UTILIZZARE OGGI: gli strumenti di PRG32 (si usa, non si studia, in questo corso).
 Per il docente: Dalla documentazione di PRG32. Non eseguito per queste slide. Se la porta seriale non viene trovata, indicatela esplicitamente: COMx su Windows, /dev/ttyACM0 su Linux, /dev/cu.usbmodem... su macOS. Uno schermo nero dopo la scrittura di solito significa che è stato scritto il firmware per QEMU invece di quello della scheda, oppure che il display è collegato a piedini diversi da quelli del firmware: da ottobre 2026 i valori predefiniti sono GPIO8 per DC e GPIO9 per RST (erano GPIO1 e GPIO0), e idf.py menuconfig li cambia.</a:t>
             </a:r>
             <a:endParaRPr lang="en-US" dirty="0"/>
@@ -1666,6 +1678,7 @@
             <a:r>
               <a:rPr lang="en-US" dirty="0"/>
               <a:t>Una pagina del programma completo, esattamente com'è nel repository. Leggetelo dall'inizio: l'intestazione dice che cosa mostra il programma e come compilarlo; seguono le tre funzioni init, update e draw, poi i dati. Le righe incontrate nei listati della lezione hanno qui gli stessi commenti.
+DA UTILIZZARE OGGI: il programma completo (si usa, non si studia, in questo corso).
 Per il docente: code/l01.S, come viene compilato ed eseguito dai test. I commenti fanno parte del programma, e sono in inglese come in tutti i listati: leggeteli con il codice.</a:t>
             </a:r>
             <a:endParaRPr lang="en-US" dirty="0"/>
@@ -1755,6 +1768,7 @@
             <a:r>
               <a:rPr lang="en-US" dirty="0"/>
               <a:t>Una pagina del programma completo, esattamente com'è nel repository. Leggetelo dall'inizio: l'intestazione dice che cosa mostra il programma e come compilarlo; seguono le tre funzioni init, update e draw, poi i dati. Le righe incontrate nei listati della lezione hanno qui gli stessi commenti.
+DA UTILIZZARE OGGI: il programma completo (si usa, non si studia, in questo corso).
 Per il docente: code/l01.S, come viene compilato ed eseguito dai test. I commenti fanno parte del programma, e sono in inglese come in tutti i listati: leggeteli con il codice.</a:t>
             </a:r>
             <a:endParaRPr lang="en-US" dirty="0"/>
@@ -1844,6 +1858,7 @@
             <a:r>
               <a:rPr lang="en-US" dirty="0"/>
               <a:t>Una pagina del programma completo, esattamente com'è nel repository. Leggetelo dall'inizio: l'intestazione dice che cosa mostra il programma e come compilarlo; seguono le tre funzioni init, update e draw, poi i dati. Le righe incontrate nei listati della lezione hanno qui gli stessi commenti.
+DA UTILIZZARE OGGI: il programma completo (si usa, non si studia, in questo corso).
 Per il docente: code/l01.S, come viene compilato ed eseguito dai test. I commenti fanno parte del programma, e sono in inglese come in tutti i listati: leggeteli con il codice.</a:t>
             </a:r>
             <a:endParaRPr lang="en-US" dirty="0"/>
@@ -2022,6 +2037,7 @@
             <a:r>
               <a:rPr lang="en-US" dirty="0"/>
               <a:t>La via più rapida: PRG32-QT sul vostro computer. Quattro passi, ciascuno con il suo comando. PRG32-QT si comporta come una scheda sulla porta 8080, ed è per questo che il comando di caricamento dice esp32c6. Con la modalità debug abilitata potete fermarvi su qualsiasi istruzione e leggere registri e memoria.
+DA UTILIZZARE OGGI: gli strumenti di PRG32 (si usa, non si studia, in questo corso).
 Per il docente: Eseguito dai test: la cartuccia di questa slide è compilata con questo comando ed eseguita sull'esecutore senza interfaccia di PRG32-QT. Senza la toolchain: importate il file .prg32 in PRG32-QT e scegliete Run Cartridge. Tasti: frecce o WASD per il joystick, Z o J per A, X o K per B, Invio per Start, Esc per tornare a Setup.</a:t>
             </a:r>
             <a:endParaRPr lang="en-US" dirty="0"/>
@@ -2111,6 +2127,7 @@
             <a:r>
               <a:rPr lang="en-US" dirty="0"/>
               <a:t>Lo stesso programma sull'emulatore. QEMU esegue il firmware vero su un chip emulato, quindi la cartuccia va compilata per l'architettura qemu. Caricate la cartuccia mentre QEMU è chiuso. Il firmware si apre sul menu Setup: scegliete Run Cartridge e lo slot. Ricordate che la tastiera è letta dal terminale, non dalla finestra con l'immagine.
+DA UTILIZZARE OGGI: gli strumenti di PRG32 (si usa, non si studia, in questo corso).
 Per il docente: Verificato dai test fino al caricamento: la cartuccia è compilata per l'architettura qemu e accettata nell'immagine flash dell'emulatore. Ciò che l'emulatore poi mostra non è verificato automaticamente: il QEMU di Espressif ha bisogno della sua finestra. Dall'ottobre 2026 il firmware parte da Setup: scegliete Run Cartridge, poi cart0.</a:t>
             </a:r>
             <a:endParaRPr lang="en-US" dirty="0"/>
@@ -2200,6 +2217,7 @@
             <a:r>
               <a:rPr lang="en-US" dirty="0"/>
               <a:t>Lo stesso programma sul kit. Il firmware si scrive una volta, via USB; dopo, le cartucce viaggiano sul Wi-Fi. Il comando di caricamento è quello usato per PRG32-QT con l'indirizzo della scheda. È l'unico host che i test automatici non eseguono: provatelo, e riferite ciò che vedete.
+DA UTILIZZARE OGGI: gli strumenti di PRG32 (si usa, non si studia, in questo corso).
 Per il docente: Non eseguito dai test: sulla macchina di prova non c'è una scheda. La cartuccia per l'architettura esp32c6 è compilata dai test; i passi sono quelli della documentazione di PRG32. Se la porta seriale non viene trovata, passatela esplicitamente. Per usare il Wi-Fi dell'aula: python3 -m prg32 wifi set --ssid NOME --password PASSWORD --mode sta.</a:t>
             </a:r>
             <a:endParaRPr lang="en-US" dirty="0"/>
@@ -2289,6 +2307,7 @@
             <a:r>
               <a:rPr lang="en-US" dirty="0"/>
               <a:t>I cinque sintomi più comuni, che cosa significa ciascuno, e che cosa fare. Leggete il messaggio prima di cambiare qualcosa: quasi sempre nomina la causa.
+DA UTILIZZARE OGGI: gli strumenti di PRG32 (si usa, non si studia, in questo corso).
 Per il docente: Le prime tre righe coprono la maggior parte dei casi. Quando chiedete aiuto, incollate il comando e l'intero messaggio come testo. docs/usage/troubleshooting.md del repository di PRG32 ha l'elenco completo.</a:t>
             </a:r>
             <a:endParaRPr lang="en-US" dirty="0"/>
@@ -2467,6 +2486,7 @@
             <a:r>
               <a:rPr lang="en-US" dirty="0"/>
               <a:t>Trovate la riga del vostro sistema e scaricate quel file dalla pagina Releases del repository di PRG32-QT, sempre dall'ultimo rilascio. Windows ha un installatore, macOS un'immagine disco (una per Apple Silicon, una per Intel), Linux e Raspberry Pi OS un pacchetto Debian. Il numero 0.4.1 è la versione di ottobre 2026: quando leggerete potrà essere più alto, e i nomi dei file seguono lo stesso schema. Se non sapete quale Mac avete, la slide su macOS dice come scoprirlo.
+DA UTILIZZARE OGGI: gli strumenti di PRG32 (si usa, non si studia, in questo corso).
 Per il docente: Da github.com/riscv-prg32/PRG32-QT, Releases, l'ultimo rilascio. 0.4.1 è la versione di ottobre 2026: i nomi dei file seguono questo schema con il numero corrente. Il file SHA256SUMS-platforms.txt elenca le somme di controllo. Nella stessa pagina ci sono i pacchetti per Android e Android TV.</a:t>
             </a:r>
             <a:endParaRPr lang="en-US" dirty="0"/>
@@ -2556,6 +2576,7 @@
             <a:r>
               <a:rPr lang="en-US" dirty="0"/>
               <a:t>Su Windows le mosse sono quattro: scaricare il file Setup, eseguirlo, accettare la cartella proposta, e avviare PRG32 dal menu Start. Possono comparire due avvisi, entrambi previsti. SmartScreen può mostrare un riquadro blu perché l'installatore non viene dal Microsoft Store: scegliete Ulteriori informazioni, poi Esegui comunque. Il firewall può chiedere un permesso: concedetelo sulle reti private. PRG32-QT ascolta sulla porta 8080 per ricevere le cartucce dagli strumenti, e lo userete nel passo 3.
+DA UTILIZZARE OGGI: gli strumenti di PRG32 (si usa, non si studia, in questo corso).
 Per il docente: L'installatore contiene le librerie Qt e il runtime del compilatore: non c'è altro da installare. La domanda del firewall compare perché PRG32-QT ascolta sulla porta 8080 le cartucce inviate dagli strumenti: il passo 3 la usa.</a:t>
             </a:r>
             <a:endParaRPr lang="en-US" dirty="0"/>
@@ -2645,6 +2666,7 @@
             <a:r>
               <a:rPr lang="en-US" dirty="0"/>
               <a:t>Su un Mac, scoprite prima quale processore avete: menu Apple, Informazioni su questo Mac. «Chip Apple M...» significa il file ARM64; «Processore Intel» significa quello Intel. Aprite l'immagine disco e trascinate PRG32 su Applicazioni. Al primo avvio macOS può rifiutarsi di aprire un'applicazione che non viene dall'App Store: clic destro e Apri, oppure Privacy e sicurezza nelle Impostazioni di Sistema. Poi accettate le connessioni in entrata e l'accesso alla rete locale, che servono all'applicazione per ricevere le cartucce.
+DA UTILIZZARE OGGI: gli strumenti di PRG32 (si usa, non si studia, in questo corso).
 Per il docente: Il passo del primo avvio serve se macOS dice che lo sviluppatore non può essere verificato: l'applicazione è distribuita fuori dall'App Store. I due permessi servono all'interfaccia di dispositivo sulla porta 8080 e al suo annuncio sulla rete locale.</a:t>
             </a:r>
             <a:endParaRPr lang="en-US" dirty="0"/>
@@ -2734,6 +2756,7 @@
             <a:r>
               <a:rPr lang="en-US" dirty="0"/>
               <a:t>Su Linux la metà superiore del listato installa il pacchetto: apt install con ./ davanti al nome del file installa il file insieme a ciò da cui dipende. Il programma è poi /usr/bin/PRG32. Il requisito da controllare è Qt 6.5 o successivo: Debian 13 e Ubuntu 25.04 lo hanno; Ubuntu 24.04 no. La metà inferiore è l'alternativa per i sistemi più vecchi, la compilazione da sorgente con lo script del repository. Le righe che cominciano con # sono commenti: non vanno battute.
+DA UTILIZZARE OGGI: gli strumenti di PRG32 (si usa, non si studia, in questo corso).
 Per il docente: Il pacchetto dipende dai pacchetti Qt 6 QML, Multimedia e WebSockets della distribuzione. Dove il Qt di sistema è più vecchio della 6.5, installate Qt con l'installatore online di qt.io e compilate con quello. Su Raspberry Pi OS usate il pacchetto ARM64, oppure scripts/build-raspbian.sh.</a:t>
             </a:r>
             <a:endParaRPr lang="en-US" dirty="0"/>
@@ -3001,6 +3024,7 @@
             <a:r>
               <a:rPr lang="en-US" dirty="0"/>
               <a:t>Su Windows i primi tre passi usano installatori grafici: Git, Python, e l'ESP-IDF Tools Installer, in cui si scelgono un rilascio 5.4 o successivo e i target esp32c3 ed esp32c6. L'installatore crea un collegamento chiamato ESP-IDF PowerShell: lavorate sempre in quella finestra, mai in un terminale qualsiasi. I cinque comandi clonano il repository di PRG32, installano due pacchetti Python ed eseguono il doctor. Su Windows l'interprete si chiama python, non python3.
+DA UTILIZZARE OGGI: gli strumenti di PRG32 (si usa, non si studia, in questo corso).
 Per il docente: Dal README di PRG32. Un'alternativa per chi preferisce un editor: Visual Studio Code con l'estensione Espressif ESP-IDF, che installa la stessa toolchain. Evitate cartelle con spazi o lettere accentate nel percorso: i vecchi strumenti di compilazione non li gradiscono.</a:t>
             </a:r>
             <a:endParaRPr lang="en-US" dirty="0"/>
@@ -4082,6 +4106,420 @@
       </p:pic>
       <p:sp>
         <p:nvSpPr>
+          <p:cNvPr id="14" name="Shape 11"/>
+          <p:cNvSpPr/>
+          <p:nvPr/>
+        </p:nvSpPr>
+        <p:spPr>
+          <a:xfrm>
+            <a:off x="8910777" y="91440"/>
+            <a:ext cx="2732278" cy="274320"/>
+          </a:xfrm>
+          <a:prstGeom prst="rect">
+            <a:avLst/>
+          </a:prstGeom>
+          <a:solidFill>
+            <a:srgbClr val="F3E8FF"/>
+          </a:solidFill>
+          <a:ln w="12700">
+            <a:solidFill>
+              <a:srgbClr val="7E22CE"/>
+            </a:solidFill>
+            <a:prstDash val="dash"/>
+          </a:ln>
+        </p:spPr>
+      </p:sp>
+      <p:sp>
+        <p:nvSpPr>
+          <p:cNvPr id="15" name="Shape 12"/>
+          <p:cNvSpPr/>
+          <p:nvPr/>
+        </p:nvSpPr>
+        <p:spPr>
+          <a:xfrm>
+            <a:off x="8938209" y="128016"/>
+            <a:ext cx="45720" cy="45720"/>
+          </a:xfrm>
+          <a:prstGeom prst="rect">
+            <a:avLst/>
+          </a:prstGeom>
+          <a:solidFill>
+            <a:srgbClr val="7E22CE"/>
+          </a:solidFill>
+          <a:ln w="12700">
+            <a:solidFill>
+              <a:srgbClr val="7E22CE"/>
+            </a:solidFill>
+            <a:prstDash val="solid"/>
+          </a:ln>
+        </p:spPr>
+      </p:sp>
+      <p:sp>
+        <p:nvSpPr>
+          <p:cNvPr id="16" name="Shape 13"/>
+          <p:cNvSpPr/>
+          <p:nvPr/>
+        </p:nvSpPr>
+        <p:spPr>
+          <a:xfrm>
+            <a:off x="8938209" y="205740"/>
+            <a:ext cx="45720" cy="45720"/>
+          </a:xfrm>
+          <a:prstGeom prst="rect">
+            <a:avLst/>
+          </a:prstGeom>
+          <a:solidFill>
+            <a:srgbClr val="7E22CE"/>
+          </a:solidFill>
+          <a:ln w="12700">
+            <a:solidFill>
+              <a:srgbClr val="7E22CE"/>
+            </a:solidFill>
+            <a:prstDash val="solid"/>
+          </a:ln>
+        </p:spPr>
+      </p:sp>
+      <p:sp>
+        <p:nvSpPr>
+          <p:cNvPr id="17" name="Shape 14"/>
+          <p:cNvSpPr/>
+          <p:nvPr/>
+        </p:nvSpPr>
+        <p:spPr>
+          <a:xfrm>
+            <a:off x="8938209" y="283464"/>
+            <a:ext cx="45720" cy="45720"/>
+          </a:xfrm>
+          <a:prstGeom prst="rect">
+            <a:avLst/>
+          </a:prstGeom>
+          <a:solidFill>
+            <a:srgbClr val="7E22CE"/>
+          </a:solidFill>
+          <a:ln w="12700">
+            <a:solidFill>
+              <a:srgbClr val="7E22CE"/>
+            </a:solidFill>
+            <a:prstDash val="solid"/>
+          </a:ln>
+        </p:spPr>
+      </p:sp>
+      <p:pic>
+        <p:nvPicPr>
+          <p:cNvPr id="18" name="Image 1" descr="preencoded.png">    </p:cNvPr>
+          <p:cNvPicPr>
+            <a:picLocks noChangeAspect="1"/>
+          </p:cNvPicPr>
+          <p:nvPr/>
+        </p:nvPicPr>
+        <p:blipFill>
+          <a:blip r:embed="rId2"/>
+          <a:stretch>
+            <a:fillRect/>
+          </a:stretch>
+        </p:blipFill>
+        <p:spPr>
+          <a:xfrm>
+            <a:off x="9038793" y="128016"/>
+            <a:ext cx="201168" cy="201168"/>
+          </a:xfrm>
+          <a:prstGeom prst="rect">
+            <a:avLst/>
+          </a:prstGeom>
+        </p:spPr>
+      </p:pic>
+      <p:sp>
+        <p:nvSpPr>
+          <p:cNvPr id="19" name="Text 15"/>
+          <p:cNvSpPr txBox="1"/>
+          <p:nvPr/>
+        </p:nvSpPr>
+        <p:spPr>
+          <a:xfrm>
+            <a:off x="9294825" y="91440"/>
+            <a:ext cx="2311654" cy="274320"/>
+          </a:xfrm>
+          <a:prstGeom prst="rect">
+            <a:avLst/>
+          </a:prstGeom>
+          <a:noFill/>
+          <a:ln/>
+        </p:spPr>
+        <p:txBody>
+          <a:bodyPr wrap="square" lIns="0" tIns="0" rIns="0" bIns="0" rtlCol="0" anchor="ctr"/>
+          <a:lstStyle/>
+          <a:p>
+            <a:pPr indent="0" marL="0">
+              <a:buNone/>
+            </a:pPr>
+            <a:r>
+              <a:rPr lang="en-US" sz="1100" b="1" dirty="0">
+                <a:solidFill>
+                  <a:srgbClr val="6B21A8"/>
+                </a:solidFill>
+                <a:latin typeface="Calibri" pitchFamily="34" charset="0"/>
+                <a:ea typeface="Calibri" pitchFamily="34" charset="-122"/>
+                <a:cs typeface="Calibri" pitchFamily="34" charset="-120"/>
+              </a:rPr>
+              <a:t>DA COMPRENDERE PIÙ AVANTI</a:t>
+            </a:r>
+            <a:endParaRPr lang="en-US" sz="1100" dirty="0"/>
+          </a:p>
+        </p:txBody>
+      </p:sp>
+      <p:sp>
+        <p:nvSpPr>
+          <p:cNvPr id="20" name="Shape 16"/>
+          <p:cNvSpPr/>
+          <p:nvPr/>
+        </p:nvSpPr>
+        <p:spPr>
+          <a:xfrm>
+            <a:off x="6675069" y="91440"/>
+            <a:ext cx="2125980" cy="274320"/>
+          </a:xfrm>
+          <a:prstGeom prst="rect">
+            <a:avLst/>
+          </a:prstGeom>
+          <a:solidFill>
+            <a:srgbClr val="FEF3C7"/>
+          </a:solidFill>
+          <a:ln w="12700">
+            <a:solidFill>
+              <a:srgbClr val="B45309"/>
+            </a:solidFill>
+            <a:prstDash val="solid"/>
+          </a:ln>
+        </p:spPr>
+      </p:sp>
+      <p:sp>
+        <p:nvSpPr>
+          <p:cNvPr id="21" name="Shape 17"/>
+          <p:cNvSpPr/>
+          <p:nvPr/>
+        </p:nvSpPr>
+        <p:spPr>
+          <a:xfrm>
+            <a:off x="6675069" y="91440"/>
+            <a:ext cx="27432" cy="274320"/>
+          </a:xfrm>
+          <a:prstGeom prst="rect">
+            <a:avLst/>
+          </a:prstGeom>
+          <a:solidFill>
+            <a:srgbClr val="B45309"/>
+          </a:solidFill>
+          <a:ln w="12700">
+            <a:solidFill>
+              <a:srgbClr val="B45309"/>
+            </a:solidFill>
+            <a:prstDash val="solid"/>
+          </a:ln>
+        </p:spPr>
+      </p:sp>
+      <p:sp>
+        <p:nvSpPr>
+          <p:cNvPr id="22" name="Shape 18"/>
+          <p:cNvSpPr/>
+          <p:nvPr/>
+        </p:nvSpPr>
+        <p:spPr>
+          <a:xfrm>
+            <a:off x="6729933" y="91440"/>
+            <a:ext cx="27432" cy="274320"/>
+          </a:xfrm>
+          <a:prstGeom prst="rect">
+            <a:avLst/>
+          </a:prstGeom>
+          <a:solidFill>
+            <a:srgbClr val="B45309"/>
+          </a:solidFill>
+          <a:ln w="12700">
+            <a:solidFill>
+              <a:srgbClr val="B45309"/>
+            </a:solidFill>
+            <a:prstDash val="solid"/>
+          </a:ln>
+        </p:spPr>
+      </p:sp>
+      <p:pic>
+        <p:nvPicPr>
+          <p:cNvPr id="23" name="Image 2" descr="preencoded.png">    </p:cNvPr>
+          <p:cNvPicPr>
+            <a:picLocks noChangeAspect="1"/>
+          </p:cNvPicPr>
+          <p:nvPr/>
+        </p:nvPicPr>
+        <p:blipFill>
+          <a:blip r:embed="rId3"/>
+          <a:stretch>
+            <a:fillRect/>
+          </a:stretch>
+        </p:blipFill>
+        <p:spPr>
+          <a:xfrm>
+            <a:off x="6803085" y="128016"/>
+            <a:ext cx="201168" cy="201168"/>
+          </a:xfrm>
+          <a:prstGeom prst="rect">
+            <a:avLst/>
+          </a:prstGeom>
+        </p:spPr>
+      </p:pic>
+      <p:sp>
+        <p:nvSpPr>
+          <p:cNvPr id="24" name="Text 19"/>
+          <p:cNvSpPr txBox="1"/>
+          <p:nvPr/>
+        </p:nvSpPr>
+        <p:spPr>
+          <a:xfrm>
+            <a:off x="7059117" y="91440"/>
+            <a:ext cx="1705356" cy="274320"/>
+          </a:xfrm>
+          <a:prstGeom prst="rect">
+            <a:avLst/>
+          </a:prstGeom>
+          <a:noFill/>
+          <a:ln/>
+        </p:spPr>
+        <p:txBody>
+          <a:bodyPr wrap="square" lIns="0" tIns="0" rIns="0" bIns="0" rtlCol="0" anchor="ctr"/>
+          <a:lstStyle/>
+          <a:p>
+            <a:pPr indent="0" marL="0">
+              <a:buNone/>
+            </a:pPr>
+            <a:r>
+              <a:rPr lang="en-US" sz="1100" b="1" dirty="0">
+                <a:solidFill>
+                  <a:srgbClr val="92400E"/>
+                </a:solidFill>
+                <a:latin typeface="Calibri" pitchFamily="34" charset="0"/>
+                <a:ea typeface="Calibri" pitchFamily="34" charset="-122"/>
+                <a:cs typeface="Calibri" pitchFamily="34" charset="-120"/>
+              </a:rPr>
+              <a:t>DA UTILIZZARE OGGI</a:t>
+            </a:r>
+            <a:endParaRPr lang="en-US" sz="1100" dirty="0"/>
+          </a:p>
+        </p:txBody>
+      </p:sp>
+      <p:sp>
+        <p:nvSpPr>
+          <p:cNvPr id="25" name="Shape 20"/>
+          <p:cNvSpPr/>
+          <p:nvPr/>
+        </p:nvSpPr>
+        <p:spPr>
+          <a:xfrm>
+            <a:off x="4352747" y="91440"/>
+            <a:ext cx="2212594" cy="274320"/>
+          </a:xfrm>
+          <a:prstGeom prst="rect">
+            <a:avLst/>
+          </a:prstGeom>
+          <a:solidFill>
+            <a:srgbClr val="E0F2FE"/>
+          </a:solidFill>
+          <a:ln w="12700">
+            <a:solidFill>
+              <a:srgbClr val="0369A1"/>
+            </a:solidFill>
+            <a:prstDash val="solid"/>
+          </a:ln>
+        </p:spPr>
+      </p:sp>
+      <p:sp>
+        <p:nvSpPr>
+          <p:cNvPr id="26" name="Shape 21"/>
+          <p:cNvSpPr/>
+          <p:nvPr/>
+        </p:nvSpPr>
+        <p:spPr>
+          <a:xfrm>
+            <a:off x="4352747" y="91440"/>
+            <a:ext cx="73152" cy="274320"/>
+          </a:xfrm>
+          <a:prstGeom prst="rect">
+            <a:avLst/>
+          </a:prstGeom>
+          <a:solidFill>
+            <a:srgbClr val="0369A1"/>
+          </a:solidFill>
+          <a:ln w="12700">
+            <a:solidFill>
+              <a:srgbClr val="0369A1"/>
+            </a:solidFill>
+            <a:prstDash val="solid"/>
+          </a:ln>
+        </p:spPr>
+      </p:sp>
+      <p:pic>
+        <p:nvPicPr>
+          <p:cNvPr id="27" name="Image 3" descr="preencoded.png">    </p:cNvPr>
+          <p:cNvPicPr>
+            <a:picLocks noChangeAspect="1"/>
+          </p:cNvPicPr>
+          <p:nvPr/>
+        </p:nvPicPr>
+        <p:blipFill>
+          <a:blip r:embed="rId4"/>
+          <a:stretch>
+            <a:fillRect/>
+          </a:stretch>
+        </p:blipFill>
+        <p:spPr>
+          <a:xfrm>
+            <a:off x="4480763" y="128016"/>
+            <a:ext cx="201168" cy="201168"/>
+          </a:xfrm>
+          <a:prstGeom prst="rect">
+            <a:avLst/>
+          </a:prstGeom>
+        </p:spPr>
+      </p:pic>
+      <p:sp>
+        <p:nvSpPr>
+          <p:cNvPr id="28" name="Text 22"/>
+          <p:cNvSpPr txBox="1"/>
+          <p:nvPr/>
+        </p:nvSpPr>
+        <p:spPr>
+          <a:xfrm>
+            <a:off x="4736795" y="91440"/>
+            <a:ext cx="1791970" cy="274320"/>
+          </a:xfrm>
+          <a:prstGeom prst="rect">
+            <a:avLst/>
+          </a:prstGeom>
+          <a:noFill/>
+          <a:ln/>
+        </p:spPr>
+        <p:txBody>
+          <a:bodyPr wrap="square" lIns="0" tIns="0" rIns="0" bIns="0" rtlCol="0" anchor="ctr"/>
+          <a:lstStyle/>
+          <a:p>
+            <a:pPr indent="0" marL="0">
+              <a:buNone/>
+            </a:pPr>
+            <a:r>
+              <a:rPr lang="en-US" sz="1100" b="1" dirty="0">
+                <a:solidFill>
+                  <a:srgbClr val="075985"/>
+                </a:solidFill>
+                <a:latin typeface="Calibri" pitchFamily="34" charset="0"/>
+                <a:ea typeface="Calibri" pitchFamily="34" charset="-122"/>
+                <a:cs typeface="Calibri" pitchFamily="34" charset="-120"/>
+              </a:rPr>
+              <a:t>DA COMPRENDERE OGGI</a:t>
+            </a:r>
+            <a:endParaRPr lang="en-US" sz="1100" dirty="0"/>
+          </a:p>
+        </p:txBody>
+      </p:sp>
+      <p:sp>
+        <p:nvSpPr>
           <p:cNvPr id="25" name="Slide Number Placeholder 0"/>
           <p:cNvSpPr>
             <a:spLocks noGrp="1"/>
@@ -4969,6 +5407,158 @@
       </p:sp>
       <p:sp>
         <p:nvSpPr>
+          <p:cNvPr id="17" name="Shape 15"/>
+          <p:cNvSpPr/>
+          <p:nvPr/>
+        </p:nvSpPr>
+        <p:spPr>
+          <a:xfrm>
+            <a:off x="7875600" y="91440"/>
+            <a:ext cx="3767455" cy="274320"/>
+          </a:xfrm>
+          <a:prstGeom prst="rect">
+            <a:avLst/>
+          </a:prstGeom>
+          <a:solidFill>
+            <a:srgbClr val="FEF3C7"/>
+          </a:solidFill>
+          <a:ln w="12700">
+            <a:solidFill>
+              <a:srgbClr val="B45309"/>
+            </a:solidFill>
+            <a:prstDash val="solid"/>
+          </a:ln>
+        </p:spPr>
+      </p:sp>
+      <p:sp>
+        <p:nvSpPr>
+          <p:cNvPr id="18" name="Shape 16"/>
+          <p:cNvSpPr/>
+          <p:nvPr/>
+        </p:nvSpPr>
+        <p:spPr>
+          <a:xfrm>
+            <a:off x="7875600" y="91440"/>
+            <a:ext cx="27432" cy="274320"/>
+          </a:xfrm>
+          <a:prstGeom prst="rect">
+            <a:avLst/>
+          </a:prstGeom>
+          <a:solidFill>
+            <a:srgbClr val="B45309"/>
+          </a:solidFill>
+          <a:ln w="12700">
+            <a:solidFill>
+              <a:srgbClr val="B45309"/>
+            </a:solidFill>
+            <a:prstDash val="solid"/>
+          </a:ln>
+        </p:spPr>
+      </p:sp>
+      <p:sp>
+        <p:nvSpPr>
+          <p:cNvPr id="19" name="Shape 17"/>
+          <p:cNvSpPr/>
+          <p:nvPr/>
+        </p:nvSpPr>
+        <p:spPr>
+          <a:xfrm>
+            <a:off x="7930464" y="91440"/>
+            <a:ext cx="27432" cy="274320"/>
+          </a:xfrm>
+          <a:prstGeom prst="rect">
+            <a:avLst/>
+          </a:prstGeom>
+          <a:solidFill>
+            <a:srgbClr val="B45309"/>
+          </a:solidFill>
+          <a:ln w="12700">
+            <a:solidFill>
+              <a:srgbClr val="B45309"/>
+            </a:solidFill>
+            <a:prstDash val="solid"/>
+          </a:ln>
+        </p:spPr>
+      </p:sp>
+      <p:pic>
+        <p:nvPicPr>
+          <p:cNvPr id="20" name="Image 0" descr="preencoded.png">    </p:cNvPr>
+          <p:cNvPicPr>
+            <a:picLocks noChangeAspect="1"/>
+          </p:cNvPicPr>
+          <p:nvPr/>
+        </p:nvPicPr>
+        <p:blipFill>
+          <a:blip r:embed="rId1"/>
+          <a:stretch>
+            <a:fillRect/>
+          </a:stretch>
+        </p:blipFill>
+        <p:spPr>
+          <a:xfrm>
+            <a:off x="8003616" y="128016"/>
+            <a:ext cx="201168" cy="201168"/>
+          </a:xfrm>
+          <a:prstGeom prst="rect">
+            <a:avLst/>
+          </a:prstGeom>
+        </p:spPr>
+      </p:pic>
+      <p:sp>
+        <p:nvSpPr>
+          <p:cNvPr id="21" name="Text 18"/>
+          <p:cNvSpPr txBox="1"/>
+          <p:nvPr/>
+        </p:nvSpPr>
+        <p:spPr>
+          <a:xfrm>
+            <a:off x="8259648" y="91440"/>
+            <a:ext cx="3346831" cy="274320"/>
+          </a:xfrm>
+          <a:prstGeom prst="rect">
+            <a:avLst/>
+          </a:prstGeom>
+          <a:noFill/>
+          <a:ln/>
+        </p:spPr>
+        <p:txBody>
+          <a:bodyPr wrap="square" lIns="0" tIns="0" rIns="0" bIns="0" rtlCol="0" anchor="ctr"/>
+          <a:lstStyle/>
+          <a:p>
+            <a:pPr indent="0" marL="0">
+              <a:buNone/>
+            </a:pPr>
+            <a:r>
+              <a:rPr lang="en-US" sz="1100" b="1" dirty="0">
+                <a:solidFill>
+                  <a:srgbClr val="92400E"/>
+                </a:solidFill>
+                <a:latin typeface="Calibri" pitchFamily="34" charset="0"/>
+                <a:ea typeface="Calibri" pitchFamily="34" charset="-122"/>
+                <a:cs typeface="Calibri" pitchFamily="34" charset="-120"/>
+              </a:rPr>
+              <a:t>DA UTILIZZARE OGGI</a:t>
+            </a:r>
+            <a:pPr indent="0" marL="0">
+              <a:buNone/>
+            </a:pPr>
+            <a:r>
+              <a:rPr lang="en-US" sz="1100" dirty="0">
+                <a:solidFill>
+                  <a:srgbClr val="92400E"/>
+                </a:solidFill>
+                <a:latin typeface="Calibri" pitchFamily="34" charset="0"/>
+                <a:ea typeface="Calibri" pitchFamily="34" charset="-122"/>
+                <a:cs typeface="Calibri" pitchFamily="34" charset="-120"/>
+              </a:rPr>
+              <a:t> · gli strumenti di PRG32</a:t>
+            </a:r>
+            <a:endParaRPr lang="en-US" sz="1100" dirty="0"/>
+          </a:p>
+        </p:txBody>
+      </p:sp>
+      <p:sp>
+        <p:nvSpPr>
           <p:cNvPr id="25" name="Slide Number Placeholder 0"/>
           <p:cNvSpPr>
             <a:spLocks noGrp="1"/>
@@ -5907,6 +6497,158 @@
       </p:sp>
       <p:sp>
         <p:nvSpPr>
+          <p:cNvPr id="17" name="Shape 15"/>
+          <p:cNvSpPr/>
+          <p:nvPr/>
+        </p:nvSpPr>
+        <p:spPr>
+          <a:xfrm>
+            <a:off x="7875600" y="91440"/>
+            <a:ext cx="3767455" cy="274320"/>
+          </a:xfrm>
+          <a:prstGeom prst="rect">
+            <a:avLst/>
+          </a:prstGeom>
+          <a:solidFill>
+            <a:srgbClr val="FEF3C7"/>
+          </a:solidFill>
+          <a:ln w="12700">
+            <a:solidFill>
+              <a:srgbClr val="B45309"/>
+            </a:solidFill>
+            <a:prstDash val="solid"/>
+          </a:ln>
+        </p:spPr>
+      </p:sp>
+      <p:sp>
+        <p:nvSpPr>
+          <p:cNvPr id="18" name="Shape 16"/>
+          <p:cNvSpPr/>
+          <p:nvPr/>
+        </p:nvSpPr>
+        <p:spPr>
+          <a:xfrm>
+            <a:off x="7875600" y="91440"/>
+            <a:ext cx="27432" cy="274320"/>
+          </a:xfrm>
+          <a:prstGeom prst="rect">
+            <a:avLst/>
+          </a:prstGeom>
+          <a:solidFill>
+            <a:srgbClr val="B45309"/>
+          </a:solidFill>
+          <a:ln w="12700">
+            <a:solidFill>
+              <a:srgbClr val="B45309"/>
+            </a:solidFill>
+            <a:prstDash val="solid"/>
+          </a:ln>
+        </p:spPr>
+      </p:sp>
+      <p:sp>
+        <p:nvSpPr>
+          <p:cNvPr id="19" name="Shape 17"/>
+          <p:cNvSpPr/>
+          <p:nvPr/>
+        </p:nvSpPr>
+        <p:spPr>
+          <a:xfrm>
+            <a:off x="7930464" y="91440"/>
+            <a:ext cx="27432" cy="274320"/>
+          </a:xfrm>
+          <a:prstGeom prst="rect">
+            <a:avLst/>
+          </a:prstGeom>
+          <a:solidFill>
+            <a:srgbClr val="B45309"/>
+          </a:solidFill>
+          <a:ln w="12700">
+            <a:solidFill>
+              <a:srgbClr val="B45309"/>
+            </a:solidFill>
+            <a:prstDash val="solid"/>
+          </a:ln>
+        </p:spPr>
+      </p:sp>
+      <p:pic>
+        <p:nvPicPr>
+          <p:cNvPr id="20" name="Image 0" descr="preencoded.png">    </p:cNvPr>
+          <p:cNvPicPr>
+            <a:picLocks noChangeAspect="1"/>
+          </p:cNvPicPr>
+          <p:nvPr/>
+        </p:nvPicPr>
+        <p:blipFill>
+          <a:blip r:embed="rId1"/>
+          <a:stretch>
+            <a:fillRect/>
+          </a:stretch>
+        </p:blipFill>
+        <p:spPr>
+          <a:xfrm>
+            <a:off x="8003616" y="128016"/>
+            <a:ext cx="201168" cy="201168"/>
+          </a:xfrm>
+          <a:prstGeom prst="rect">
+            <a:avLst/>
+          </a:prstGeom>
+        </p:spPr>
+      </p:pic>
+      <p:sp>
+        <p:nvSpPr>
+          <p:cNvPr id="21" name="Text 18"/>
+          <p:cNvSpPr txBox="1"/>
+          <p:nvPr/>
+        </p:nvSpPr>
+        <p:spPr>
+          <a:xfrm>
+            <a:off x="8259648" y="91440"/>
+            <a:ext cx="3346831" cy="274320"/>
+          </a:xfrm>
+          <a:prstGeom prst="rect">
+            <a:avLst/>
+          </a:prstGeom>
+          <a:noFill/>
+          <a:ln/>
+        </p:spPr>
+        <p:txBody>
+          <a:bodyPr wrap="square" lIns="0" tIns="0" rIns="0" bIns="0" rtlCol="0" anchor="ctr"/>
+          <a:lstStyle/>
+          <a:p>
+            <a:pPr indent="0" marL="0">
+              <a:buNone/>
+            </a:pPr>
+            <a:r>
+              <a:rPr lang="en-US" sz="1100" b="1" dirty="0">
+                <a:solidFill>
+                  <a:srgbClr val="92400E"/>
+                </a:solidFill>
+                <a:latin typeface="Calibri" pitchFamily="34" charset="0"/>
+                <a:ea typeface="Calibri" pitchFamily="34" charset="-122"/>
+                <a:cs typeface="Calibri" pitchFamily="34" charset="-120"/>
+              </a:rPr>
+              <a:t>DA UTILIZZARE OGGI</a:t>
+            </a:r>
+            <a:pPr indent="0" marL="0">
+              <a:buNone/>
+            </a:pPr>
+            <a:r>
+              <a:rPr lang="en-US" sz="1100" dirty="0">
+                <a:solidFill>
+                  <a:srgbClr val="92400E"/>
+                </a:solidFill>
+                <a:latin typeface="Calibri" pitchFamily="34" charset="0"/>
+                <a:ea typeface="Calibri" pitchFamily="34" charset="-122"/>
+                <a:cs typeface="Calibri" pitchFamily="34" charset="-120"/>
+              </a:rPr>
+              <a:t> · gli strumenti di PRG32</a:t>
+            </a:r>
+            <a:endParaRPr lang="en-US" sz="1100" dirty="0"/>
+          </a:p>
+        </p:txBody>
+      </p:sp>
+      <p:sp>
+        <p:nvSpPr>
           <p:cNvPr id="25" name="Slide Number Placeholder 0"/>
           <p:cNvSpPr>
             <a:spLocks noGrp="1"/>
@@ -6760,6 +7502,158 @@
       </p:sp>
       <p:sp>
         <p:nvSpPr>
+          <p:cNvPr id="17" name="Shape 15"/>
+          <p:cNvSpPr/>
+          <p:nvPr/>
+        </p:nvSpPr>
+        <p:spPr>
+          <a:xfrm>
+            <a:off x="7875600" y="91440"/>
+            <a:ext cx="3767455" cy="274320"/>
+          </a:xfrm>
+          <a:prstGeom prst="rect">
+            <a:avLst/>
+          </a:prstGeom>
+          <a:solidFill>
+            <a:srgbClr val="FEF3C7"/>
+          </a:solidFill>
+          <a:ln w="12700">
+            <a:solidFill>
+              <a:srgbClr val="B45309"/>
+            </a:solidFill>
+            <a:prstDash val="solid"/>
+          </a:ln>
+        </p:spPr>
+      </p:sp>
+      <p:sp>
+        <p:nvSpPr>
+          <p:cNvPr id="18" name="Shape 16"/>
+          <p:cNvSpPr/>
+          <p:nvPr/>
+        </p:nvSpPr>
+        <p:spPr>
+          <a:xfrm>
+            <a:off x="7875600" y="91440"/>
+            <a:ext cx="27432" cy="274320"/>
+          </a:xfrm>
+          <a:prstGeom prst="rect">
+            <a:avLst/>
+          </a:prstGeom>
+          <a:solidFill>
+            <a:srgbClr val="B45309"/>
+          </a:solidFill>
+          <a:ln w="12700">
+            <a:solidFill>
+              <a:srgbClr val="B45309"/>
+            </a:solidFill>
+            <a:prstDash val="solid"/>
+          </a:ln>
+        </p:spPr>
+      </p:sp>
+      <p:sp>
+        <p:nvSpPr>
+          <p:cNvPr id="19" name="Shape 17"/>
+          <p:cNvSpPr/>
+          <p:nvPr/>
+        </p:nvSpPr>
+        <p:spPr>
+          <a:xfrm>
+            <a:off x="7930464" y="91440"/>
+            <a:ext cx="27432" cy="274320"/>
+          </a:xfrm>
+          <a:prstGeom prst="rect">
+            <a:avLst/>
+          </a:prstGeom>
+          <a:solidFill>
+            <a:srgbClr val="B45309"/>
+          </a:solidFill>
+          <a:ln w="12700">
+            <a:solidFill>
+              <a:srgbClr val="B45309"/>
+            </a:solidFill>
+            <a:prstDash val="solid"/>
+          </a:ln>
+        </p:spPr>
+      </p:sp>
+      <p:pic>
+        <p:nvPicPr>
+          <p:cNvPr id="20" name="Image 0" descr="preencoded.png">    </p:cNvPr>
+          <p:cNvPicPr>
+            <a:picLocks noChangeAspect="1"/>
+          </p:cNvPicPr>
+          <p:nvPr/>
+        </p:nvPicPr>
+        <p:blipFill>
+          <a:blip r:embed="rId1"/>
+          <a:stretch>
+            <a:fillRect/>
+          </a:stretch>
+        </p:blipFill>
+        <p:spPr>
+          <a:xfrm>
+            <a:off x="8003616" y="128016"/>
+            <a:ext cx="201168" cy="201168"/>
+          </a:xfrm>
+          <a:prstGeom prst="rect">
+            <a:avLst/>
+          </a:prstGeom>
+        </p:spPr>
+      </p:pic>
+      <p:sp>
+        <p:nvSpPr>
+          <p:cNvPr id="21" name="Text 18"/>
+          <p:cNvSpPr txBox="1"/>
+          <p:nvPr/>
+        </p:nvSpPr>
+        <p:spPr>
+          <a:xfrm>
+            <a:off x="8259648" y="91440"/>
+            <a:ext cx="3346831" cy="274320"/>
+          </a:xfrm>
+          <a:prstGeom prst="rect">
+            <a:avLst/>
+          </a:prstGeom>
+          <a:noFill/>
+          <a:ln/>
+        </p:spPr>
+        <p:txBody>
+          <a:bodyPr wrap="square" lIns="0" tIns="0" rIns="0" bIns="0" rtlCol="0" anchor="ctr"/>
+          <a:lstStyle/>
+          <a:p>
+            <a:pPr indent="0" marL="0">
+              <a:buNone/>
+            </a:pPr>
+            <a:r>
+              <a:rPr lang="en-US" sz="1100" b="1" dirty="0">
+                <a:solidFill>
+                  <a:srgbClr val="92400E"/>
+                </a:solidFill>
+                <a:latin typeface="Calibri" pitchFamily="34" charset="0"/>
+                <a:ea typeface="Calibri" pitchFamily="34" charset="-122"/>
+                <a:cs typeface="Calibri" pitchFamily="34" charset="-120"/>
+              </a:rPr>
+              <a:t>DA UTILIZZARE OGGI</a:t>
+            </a:r>
+            <a:pPr indent="0" marL="0">
+              <a:buNone/>
+            </a:pPr>
+            <a:r>
+              <a:rPr lang="en-US" sz="1100" dirty="0">
+                <a:solidFill>
+                  <a:srgbClr val="92400E"/>
+                </a:solidFill>
+                <a:latin typeface="Calibri" pitchFamily="34" charset="0"/>
+                <a:ea typeface="Calibri" pitchFamily="34" charset="-122"/>
+                <a:cs typeface="Calibri" pitchFamily="34" charset="-120"/>
+              </a:rPr>
+              <a:t> · gli strumenti di PRG32</a:t>
+            </a:r>
+            <a:endParaRPr lang="en-US" sz="1100" dirty="0"/>
+          </a:p>
+        </p:txBody>
+      </p:sp>
+      <p:sp>
+        <p:nvSpPr>
           <p:cNvPr id="25" name="Slide Number Placeholder 0"/>
           <p:cNvSpPr>
             <a:spLocks noGrp="1"/>
@@ -7528,6 +8422,158 @@
       </p:sp>
       <p:sp>
         <p:nvSpPr>
+          <p:cNvPr id="17" name="Shape 15"/>
+          <p:cNvSpPr/>
+          <p:nvPr/>
+        </p:nvSpPr>
+        <p:spPr>
+          <a:xfrm>
+            <a:off x="7875600" y="91440"/>
+            <a:ext cx="3767455" cy="274320"/>
+          </a:xfrm>
+          <a:prstGeom prst="rect">
+            <a:avLst/>
+          </a:prstGeom>
+          <a:solidFill>
+            <a:srgbClr val="FEF3C7"/>
+          </a:solidFill>
+          <a:ln w="12700">
+            <a:solidFill>
+              <a:srgbClr val="B45309"/>
+            </a:solidFill>
+            <a:prstDash val="solid"/>
+          </a:ln>
+        </p:spPr>
+      </p:sp>
+      <p:sp>
+        <p:nvSpPr>
+          <p:cNvPr id="18" name="Shape 16"/>
+          <p:cNvSpPr/>
+          <p:nvPr/>
+        </p:nvSpPr>
+        <p:spPr>
+          <a:xfrm>
+            <a:off x="7875600" y="91440"/>
+            <a:ext cx="27432" cy="274320"/>
+          </a:xfrm>
+          <a:prstGeom prst="rect">
+            <a:avLst/>
+          </a:prstGeom>
+          <a:solidFill>
+            <a:srgbClr val="B45309"/>
+          </a:solidFill>
+          <a:ln w="12700">
+            <a:solidFill>
+              <a:srgbClr val="B45309"/>
+            </a:solidFill>
+            <a:prstDash val="solid"/>
+          </a:ln>
+        </p:spPr>
+      </p:sp>
+      <p:sp>
+        <p:nvSpPr>
+          <p:cNvPr id="19" name="Shape 17"/>
+          <p:cNvSpPr/>
+          <p:nvPr/>
+        </p:nvSpPr>
+        <p:spPr>
+          <a:xfrm>
+            <a:off x="7930464" y="91440"/>
+            <a:ext cx="27432" cy="274320"/>
+          </a:xfrm>
+          <a:prstGeom prst="rect">
+            <a:avLst/>
+          </a:prstGeom>
+          <a:solidFill>
+            <a:srgbClr val="B45309"/>
+          </a:solidFill>
+          <a:ln w="12700">
+            <a:solidFill>
+              <a:srgbClr val="B45309"/>
+            </a:solidFill>
+            <a:prstDash val="solid"/>
+          </a:ln>
+        </p:spPr>
+      </p:sp>
+      <p:pic>
+        <p:nvPicPr>
+          <p:cNvPr id="20" name="Image 0" descr="preencoded.png">    </p:cNvPr>
+          <p:cNvPicPr>
+            <a:picLocks noChangeAspect="1"/>
+          </p:cNvPicPr>
+          <p:nvPr/>
+        </p:nvPicPr>
+        <p:blipFill>
+          <a:blip r:embed="rId1"/>
+          <a:stretch>
+            <a:fillRect/>
+          </a:stretch>
+        </p:blipFill>
+        <p:spPr>
+          <a:xfrm>
+            <a:off x="8003616" y="128016"/>
+            <a:ext cx="201168" cy="201168"/>
+          </a:xfrm>
+          <a:prstGeom prst="rect">
+            <a:avLst/>
+          </a:prstGeom>
+        </p:spPr>
+      </p:pic>
+      <p:sp>
+        <p:nvSpPr>
+          <p:cNvPr id="21" name="Text 18"/>
+          <p:cNvSpPr txBox="1"/>
+          <p:nvPr/>
+        </p:nvSpPr>
+        <p:spPr>
+          <a:xfrm>
+            <a:off x="8259648" y="91440"/>
+            <a:ext cx="3346831" cy="274320"/>
+          </a:xfrm>
+          <a:prstGeom prst="rect">
+            <a:avLst/>
+          </a:prstGeom>
+          <a:noFill/>
+          <a:ln/>
+        </p:spPr>
+        <p:txBody>
+          <a:bodyPr wrap="square" lIns="0" tIns="0" rIns="0" bIns="0" rtlCol="0" anchor="ctr"/>
+          <a:lstStyle/>
+          <a:p>
+            <a:pPr indent="0" marL="0">
+              <a:buNone/>
+            </a:pPr>
+            <a:r>
+              <a:rPr lang="en-US" sz="1100" b="1" dirty="0">
+                <a:solidFill>
+                  <a:srgbClr val="92400E"/>
+                </a:solidFill>
+                <a:latin typeface="Calibri" pitchFamily="34" charset="0"/>
+                <a:ea typeface="Calibri" pitchFamily="34" charset="-122"/>
+                <a:cs typeface="Calibri" pitchFamily="34" charset="-120"/>
+              </a:rPr>
+              <a:t>DA UTILIZZARE OGGI</a:t>
+            </a:r>
+            <a:pPr indent="0" marL="0">
+              <a:buNone/>
+            </a:pPr>
+            <a:r>
+              <a:rPr lang="en-US" sz="1100" dirty="0">
+                <a:solidFill>
+                  <a:srgbClr val="92400E"/>
+                </a:solidFill>
+                <a:latin typeface="Calibri" pitchFamily="34" charset="0"/>
+                <a:ea typeface="Calibri" pitchFamily="34" charset="-122"/>
+                <a:cs typeface="Calibri" pitchFamily="34" charset="-120"/>
+              </a:rPr>
+              <a:t> · gli strumenti di PRG32</a:t>
+            </a:r>
+            <a:endParaRPr lang="en-US" sz="1100" dirty="0"/>
+          </a:p>
+        </p:txBody>
+      </p:sp>
+      <p:sp>
+        <p:nvSpPr>
           <p:cNvPr id="25" name="Slide Number Placeholder 0"/>
           <p:cNvSpPr>
             <a:spLocks noGrp="1"/>
@@ -8296,6 +9342,349 @@
       </p:sp>
       <p:sp>
         <p:nvSpPr>
+          <p:cNvPr id="17" name="Shape 15"/>
+          <p:cNvSpPr/>
+          <p:nvPr/>
+        </p:nvSpPr>
+        <p:spPr>
+          <a:xfrm>
+            <a:off x="6044133" y="91440"/>
+            <a:ext cx="5598922" cy="274320"/>
+          </a:xfrm>
+          <a:prstGeom prst="rect">
+            <a:avLst/>
+          </a:prstGeom>
+          <a:solidFill>
+            <a:srgbClr val="F3E8FF"/>
+          </a:solidFill>
+          <a:ln w="12700">
+            <a:solidFill>
+              <a:srgbClr val="7E22CE"/>
+            </a:solidFill>
+            <a:prstDash val="dash"/>
+          </a:ln>
+        </p:spPr>
+      </p:sp>
+      <p:sp>
+        <p:nvSpPr>
+          <p:cNvPr id="18" name="Shape 16"/>
+          <p:cNvSpPr/>
+          <p:nvPr/>
+        </p:nvSpPr>
+        <p:spPr>
+          <a:xfrm>
+            <a:off x="6071565" y="128016"/>
+            <a:ext cx="45720" cy="45720"/>
+          </a:xfrm>
+          <a:prstGeom prst="rect">
+            <a:avLst/>
+          </a:prstGeom>
+          <a:solidFill>
+            <a:srgbClr val="7E22CE"/>
+          </a:solidFill>
+          <a:ln w="12700">
+            <a:solidFill>
+              <a:srgbClr val="7E22CE"/>
+            </a:solidFill>
+            <a:prstDash val="solid"/>
+          </a:ln>
+        </p:spPr>
+      </p:sp>
+      <p:sp>
+        <p:nvSpPr>
+          <p:cNvPr id="19" name="Shape 17"/>
+          <p:cNvSpPr/>
+          <p:nvPr/>
+        </p:nvSpPr>
+        <p:spPr>
+          <a:xfrm>
+            <a:off x="6071565" y="205740"/>
+            <a:ext cx="45720" cy="45720"/>
+          </a:xfrm>
+          <a:prstGeom prst="rect">
+            <a:avLst/>
+          </a:prstGeom>
+          <a:solidFill>
+            <a:srgbClr val="7E22CE"/>
+          </a:solidFill>
+          <a:ln w="12700">
+            <a:solidFill>
+              <a:srgbClr val="7E22CE"/>
+            </a:solidFill>
+            <a:prstDash val="solid"/>
+          </a:ln>
+        </p:spPr>
+      </p:sp>
+      <p:sp>
+        <p:nvSpPr>
+          <p:cNvPr id="20" name="Shape 18"/>
+          <p:cNvSpPr/>
+          <p:nvPr/>
+        </p:nvSpPr>
+        <p:spPr>
+          <a:xfrm>
+            <a:off x="6071565" y="283464"/>
+            <a:ext cx="45720" cy="45720"/>
+          </a:xfrm>
+          <a:prstGeom prst="rect">
+            <a:avLst/>
+          </a:prstGeom>
+          <a:solidFill>
+            <a:srgbClr val="7E22CE"/>
+          </a:solidFill>
+          <a:ln w="12700">
+            <a:solidFill>
+              <a:srgbClr val="7E22CE"/>
+            </a:solidFill>
+            <a:prstDash val="solid"/>
+          </a:ln>
+        </p:spPr>
+      </p:sp>
+      <p:pic>
+        <p:nvPicPr>
+          <p:cNvPr id="21" name="Image 0" descr="preencoded.png">    </p:cNvPr>
+          <p:cNvPicPr>
+            <a:picLocks noChangeAspect="1"/>
+          </p:cNvPicPr>
+          <p:nvPr/>
+        </p:nvPicPr>
+        <p:blipFill>
+          <a:blip r:embed="rId1"/>
+          <a:stretch>
+            <a:fillRect/>
+          </a:stretch>
+        </p:blipFill>
+        <p:spPr>
+          <a:xfrm>
+            <a:off x="6172149" y="128016"/>
+            <a:ext cx="201168" cy="201168"/>
+          </a:xfrm>
+          <a:prstGeom prst="rect">
+            <a:avLst/>
+          </a:prstGeom>
+        </p:spPr>
+      </p:pic>
+      <p:sp>
+        <p:nvSpPr>
+          <p:cNvPr id="22" name="Text 19"/>
+          <p:cNvSpPr txBox="1"/>
+          <p:nvPr/>
+        </p:nvSpPr>
+        <p:spPr>
+          <a:xfrm>
+            <a:off x="6428181" y="91440"/>
+            <a:ext cx="5178298" cy="274320"/>
+          </a:xfrm>
+          <a:prstGeom prst="rect">
+            <a:avLst/>
+          </a:prstGeom>
+          <a:noFill/>
+          <a:ln/>
+        </p:spPr>
+        <p:txBody>
+          <a:bodyPr wrap="square" lIns="0" tIns="0" rIns="0" bIns="0" rtlCol="0" anchor="ctr"/>
+          <a:lstStyle/>
+          <a:p>
+            <a:pPr indent="0" marL="0">
+              <a:buNone/>
+            </a:pPr>
+            <a:r>
+              <a:rPr lang="en-US" sz="1100" b="1" dirty="0">
+                <a:solidFill>
+                  <a:srgbClr val="6B21A8"/>
+                </a:solidFill>
+                <a:latin typeface="Calibri" pitchFamily="34" charset="0"/>
+                <a:ea typeface="Calibri" pitchFamily="34" charset="-122"/>
+                <a:cs typeface="Calibri" pitchFamily="34" charset="-120"/>
+              </a:rPr>
+              <a:t>DA COMPRENDERE PIÙ AVANTI</a:t>
+            </a:r>
+            <a:pPr indent="0" marL="0">
+              <a:buNone/>
+            </a:pPr>
+            <a:r>
+              <a:rPr lang="en-US" sz="1100" dirty="0">
+                <a:solidFill>
+                  <a:srgbClr val="6B21A8"/>
+                </a:solidFill>
+                <a:latin typeface="Calibri" pitchFamily="34" charset="0"/>
+                <a:ea typeface="Calibri" pitchFamily="34" charset="-122"/>
+                <a:cs typeface="Calibri" pitchFamily="34" charset="-120"/>
+              </a:rPr>
+              <a:t> · contratto init/update/draw</a:t>
+            </a:r>
+            <a:pPr indent="0" marL="0">
+              <a:buNone/>
+            </a:pPr>
+            <a:r>
+              <a:rPr lang="en-US" sz="1100" b="1" dirty="0">
+                <a:solidFill>
+                  <a:srgbClr val="6B21A8"/>
+                </a:solidFill>
+                <a:latin typeface="Calibri" pitchFamily="34" charset="0"/>
+                <a:ea typeface="Calibri" pitchFamily="34" charset="-122"/>
+                <a:cs typeface="Calibri" pitchFamily="34" charset="-120"/>
+              </a:rPr>
+              <a:t> → Lezione 02</a:t>
+            </a:r>
+            <a:endParaRPr lang="en-US" sz="1100" dirty="0"/>
+          </a:p>
+        </p:txBody>
+      </p:sp>
+      <p:sp>
+        <p:nvSpPr>
+          <p:cNvPr id="23" name="Shape 20"/>
+          <p:cNvSpPr/>
+          <p:nvPr/>
+        </p:nvSpPr>
+        <p:spPr>
+          <a:xfrm>
+            <a:off x="2166950" y="91440"/>
+            <a:ext cx="3767455" cy="274320"/>
+          </a:xfrm>
+          <a:prstGeom prst="rect">
+            <a:avLst/>
+          </a:prstGeom>
+          <a:solidFill>
+            <a:srgbClr val="FEF3C7"/>
+          </a:solidFill>
+          <a:ln w="12700">
+            <a:solidFill>
+              <a:srgbClr val="B45309"/>
+            </a:solidFill>
+            <a:prstDash val="solid"/>
+          </a:ln>
+        </p:spPr>
+      </p:sp>
+      <p:sp>
+        <p:nvSpPr>
+          <p:cNvPr id="24" name="Shape 21"/>
+          <p:cNvSpPr/>
+          <p:nvPr/>
+        </p:nvSpPr>
+        <p:spPr>
+          <a:xfrm>
+            <a:off x="2166950" y="91440"/>
+            <a:ext cx="27432" cy="274320"/>
+          </a:xfrm>
+          <a:prstGeom prst="rect">
+            <a:avLst/>
+          </a:prstGeom>
+          <a:solidFill>
+            <a:srgbClr val="B45309"/>
+          </a:solidFill>
+          <a:ln w="12700">
+            <a:solidFill>
+              <a:srgbClr val="B45309"/>
+            </a:solidFill>
+            <a:prstDash val="solid"/>
+          </a:ln>
+        </p:spPr>
+      </p:sp>
+      <p:sp>
+        <p:nvSpPr>
+          <p:cNvPr id="25" name="Shape 22"/>
+          <p:cNvSpPr/>
+          <p:nvPr/>
+        </p:nvSpPr>
+        <p:spPr>
+          <a:xfrm>
+            <a:off x="2221814" y="91440"/>
+            <a:ext cx="27432" cy="274320"/>
+          </a:xfrm>
+          <a:prstGeom prst="rect">
+            <a:avLst/>
+          </a:prstGeom>
+          <a:solidFill>
+            <a:srgbClr val="B45309"/>
+          </a:solidFill>
+          <a:ln w="12700">
+            <a:solidFill>
+              <a:srgbClr val="B45309"/>
+            </a:solidFill>
+            <a:prstDash val="solid"/>
+          </a:ln>
+        </p:spPr>
+      </p:sp>
+      <p:pic>
+        <p:nvPicPr>
+          <p:cNvPr id="26" name="Image 1" descr="preencoded.png">    </p:cNvPr>
+          <p:cNvPicPr>
+            <a:picLocks noChangeAspect="1"/>
+          </p:cNvPicPr>
+          <p:nvPr/>
+        </p:nvPicPr>
+        <p:blipFill>
+          <a:blip r:embed="rId2"/>
+          <a:stretch>
+            <a:fillRect/>
+          </a:stretch>
+        </p:blipFill>
+        <p:spPr>
+          <a:xfrm>
+            <a:off x="2294966" y="128016"/>
+            <a:ext cx="201168" cy="201168"/>
+          </a:xfrm>
+          <a:prstGeom prst="rect">
+            <a:avLst/>
+          </a:prstGeom>
+        </p:spPr>
+      </p:pic>
+      <p:sp>
+        <p:nvSpPr>
+          <p:cNvPr id="27" name="Text 23"/>
+          <p:cNvSpPr txBox="1"/>
+          <p:nvPr/>
+        </p:nvSpPr>
+        <p:spPr>
+          <a:xfrm>
+            <a:off x="2550998" y="91440"/>
+            <a:ext cx="3346831" cy="274320"/>
+          </a:xfrm>
+          <a:prstGeom prst="rect">
+            <a:avLst/>
+          </a:prstGeom>
+          <a:noFill/>
+          <a:ln/>
+        </p:spPr>
+        <p:txBody>
+          <a:bodyPr wrap="square" lIns="0" tIns="0" rIns="0" bIns="0" rtlCol="0" anchor="ctr"/>
+          <a:lstStyle/>
+          <a:p>
+            <a:pPr indent="0" marL="0">
+              <a:buNone/>
+            </a:pPr>
+            <a:r>
+              <a:rPr lang="en-US" sz="1100" b="1" dirty="0">
+                <a:solidFill>
+                  <a:srgbClr val="92400E"/>
+                </a:solidFill>
+                <a:latin typeface="Calibri" pitchFamily="34" charset="0"/>
+                <a:ea typeface="Calibri" pitchFamily="34" charset="-122"/>
+                <a:cs typeface="Calibri" pitchFamily="34" charset="-120"/>
+              </a:rPr>
+              <a:t>DA UTILIZZARE OGGI</a:t>
+            </a:r>
+            <a:pPr indent="0" marL="0">
+              <a:buNone/>
+            </a:pPr>
+            <a:r>
+              <a:rPr lang="en-US" sz="1100" dirty="0">
+                <a:solidFill>
+                  <a:srgbClr val="92400E"/>
+                </a:solidFill>
+                <a:latin typeface="Calibri" pitchFamily="34" charset="0"/>
+                <a:ea typeface="Calibri" pitchFamily="34" charset="-122"/>
+                <a:cs typeface="Calibri" pitchFamily="34" charset="-120"/>
+              </a:rPr>
+              <a:t> · gli strumenti di PRG32</a:t>
+            </a:r>
+            <a:endParaRPr lang="en-US" sz="1100" dirty="0"/>
+          </a:p>
+        </p:txBody>
+      </p:sp>
+      <p:sp>
+        <p:nvSpPr>
           <p:cNvPr id="25" name="Slide Number Placeholder 0"/>
           <p:cNvSpPr>
             <a:spLocks noGrp="1"/>
@@ -9115,6 +10504,158 @@
       </p:sp>
       <p:sp>
         <p:nvSpPr>
+          <p:cNvPr id="17" name="Shape 15"/>
+          <p:cNvSpPr/>
+          <p:nvPr/>
+        </p:nvSpPr>
+        <p:spPr>
+          <a:xfrm>
+            <a:off x="7875600" y="91440"/>
+            <a:ext cx="3767455" cy="274320"/>
+          </a:xfrm>
+          <a:prstGeom prst="rect">
+            <a:avLst/>
+          </a:prstGeom>
+          <a:solidFill>
+            <a:srgbClr val="FEF3C7"/>
+          </a:solidFill>
+          <a:ln w="12700">
+            <a:solidFill>
+              <a:srgbClr val="B45309"/>
+            </a:solidFill>
+            <a:prstDash val="solid"/>
+          </a:ln>
+        </p:spPr>
+      </p:sp>
+      <p:sp>
+        <p:nvSpPr>
+          <p:cNvPr id="18" name="Shape 16"/>
+          <p:cNvSpPr/>
+          <p:nvPr/>
+        </p:nvSpPr>
+        <p:spPr>
+          <a:xfrm>
+            <a:off x="7875600" y="91440"/>
+            <a:ext cx="27432" cy="274320"/>
+          </a:xfrm>
+          <a:prstGeom prst="rect">
+            <a:avLst/>
+          </a:prstGeom>
+          <a:solidFill>
+            <a:srgbClr val="B45309"/>
+          </a:solidFill>
+          <a:ln w="12700">
+            <a:solidFill>
+              <a:srgbClr val="B45309"/>
+            </a:solidFill>
+            <a:prstDash val="solid"/>
+          </a:ln>
+        </p:spPr>
+      </p:sp>
+      <p:sp>
+        <p:nvSpPr>
+          <p:cNvPr id="19" name="Shape 17"/>
+          <p:cNvSpPr/>
+          <p:nvPr/>
+        </p:nvSpPr>
+        <p:spPr>
+          <a:xfrm>
+            <a:off x="7930464" y="91440"/>
+            <a:ext cx="27432" cy="274320"/>
+          </a:xfrm>
+          <a:prstGeom prst="rect">
+            <a:avLst/>
+          </a:prstGeom>
+          <a:solidFill>
+            <a:srgbClr val="B45309"/>
+          </a:solidFill>
+          <a:ln w="12700">
+            <a:solidFill>
+              <a:srgbClr val="B45309"/>
+            </a:solidFill>
+            <a:prstDash val="solid"/>
+          </a:ln>
+        </p:spPr>
+      </p:sp>
+      <p:pic>
+        <p:nvPicPr>
+          <p:cNvPr id="20" name="Image 0" descr="preencoded.png">    </p:cNvPr>
+          <p:cNvPicPr>
+            <a:picLocks noChangeAspect="1"/>
+          </p:cNvPicPr>
+          <p:nvPr/>
+        </p:nvPicPr>
+        <p:blipFill>
+          <a:blip r:embed="rId1"/>
+          <a:stretch>
+            <a:fillRect/>
+          </a:stretch>
+        </p:blipFill>
+        <p:spPr>
+          <a:xfrm>
+            <a:off x="8003616" y="128016"/>
+            <a:ext cx="201168" cy="201168"/>
+          </a:xfrm>
+          <a:prstGeom prst="rect">
+            <a:avLst/>
+          </a:prstGeom>
+        </p:spPr>
+      </p:pic>
+      <p:sp>
+        <p:nvSpPr>
+          <p:cNvPr id="21" name="Text 18"/>
+          <p:cNvSpPr txBox="1"/>
+          <p:nvPr/>
+        </p:nvSpPr>
+        <p:spPr>
+          <a:xfrm>
+            <a:off x="8259648" y="91440"/>
+            <a:ext cx="3346831" cy="274320"/>
+          </a:xfrm>
+          <a:prstGeom prst="rect">
+            <a:avLst/>
+          </a:prstGeom>
+          <a:noFill/>
+          <a:ln/>
+        </p:spPr>
+        <p:txBody>
+          <a:bodyPr wrap="square" lIns="0" tIns="0" rIns="0" bIns="0" rtlCol="0" anchor="ctr"/>
+          <a:lstStyle/>
+          <a:p>
+            <a:pPr indent="0" marL="0">
+              <a:buNone/>
+            </a:pPr>
+            <a:r>
+              <a:rPr lang="en-US" sz="1100" b="1" dirty="0">
+                <a:solidFill>
+                  <a:srgbClr val="92400E"/>
+                </a:solidFill>
+                <a:latin typeface="Calibri" pitchFamily="34" charset="0"/>
+                <a:ea typeface="Calibri" pitchFamily="34" charset="-122"/>
+                <a:cs typeface="Calibri" pitchFamily="34" charset="-120"/>
+              </a:rPr>
+              <a:t>DA UTILIZZARE OGGI</a:t>
+            </a:r>
+            <a:pPr indent="0" marL="0">
+              <a:buNone/>
+            </a:pPr>
+            <a:r>
+              <a:rPr lang="en-US" sz="1100" dirty="0">
+                <a:solidFill>
+                  <a:srgbClr val="92400E"/>
+                </a:solidFill>
+                <a:latin typeface="Calibri" pitchFamily="34" charset="0"/>
+                <a:ea typeface="Calibri" pitchFamily="34" charset="-122"/>
+                <a:cs typeface="Calibri" pitchFamily="34" charset="-120"/>
+              </a:rPr>
+              <a:t> · gli strumenti di PRG32</a:t>
+            </a:r>
+            <a:endParaRPr lang="en-US" sz="1100" dirty="0"/>
+          </a:p>
+        </p:txBody>
+      </p:sp>
+      <p:sp>
+        <p:nvSpPr>
           <p:cNvPr id="25" name="Slide Number Placeholder 0"/>
           <p:cNvSpPr>
             <a:spLocks noGrp="1"/>
@@ -9763,6 +11304,349 @@
       </p:sp>
       <p:sp>
         <p:nvSpPr>
+          <p:cNvPr id="15" name="Shape 13"/>
+          <p:cNvSpPr/>
+          <p:nvPr/>
+        </p:nvSpPr>
+        <p:spPr>
+          <a:xfrm>
+            <a:off x="7094677" y="91440"/>
+            <a:ext cx="4548378" cy="274320"/>
+          </a:xfrm>
+          <a:prstGeom prst="rect">
+            <a:avLst/>
+          </a:prstGeom>
+          <a:solidFill>
+            <a:srgbClr val="F3E8FF"/>
+          </a:solidFill>
+          <a:ln w="12700">
+            <a:solidFill>
+              <a:srgbClr val="7E22CE"/>
+            </a:solidFill>
+            <a:prstDash val="dash"/>
+          </a:ln>
+        </p:spPr>
+      </p:sp>
+      <p:sp>
+        <p:nvSpPr>
+          <p:cNvPr id="16" name="Shape 14"/>
+          <p:cNvSpPr/>
+          <p:nvPr/>
+        </p:nvSpPr>
+        <p:spPr>
+          <a:xfrm>
+            <a:off x="7122109" y="128016"/>
+            <a:ext cx="45720" cy="45720"/>
+          </a:xfrm>
+          <a:prstGeom prst="rect">
+            <a:avLst/>
+          </a:prstGeom>
+          <a:solidFill>
+            <a:srgbClr val="7E22CE"/>
+          </a:solidFill>
+          <a:ln w="12700">
+            <a:solidFill>
+              <a:srgbClr val="7E22CE"/>
+            </a:solidFill>
+            <a:prstDash val="solid"/>
+          </a:ln>
+        </p:spPr>
+      </p:sp>
+      <p:sp>
+        <p:nvSpPr>
+          <p:cNvPr id="17" name="Shape 15"/>
+          <p:cNvSpPr/>
+          <p:nvPr/>
+        </p:nvSpPr>
+        <p:spPr>
+          <a:xfrm>
+            <a:off x="7122109" y="205740"/>
+            <a:ext cx="45720" cy="45720"/>
+          </a:xfrm>
+          <a:prstGeom prst="rect">
+            <a:avLst/>
+          </a:prstGeom>
+          <a:solidFill>
+            <a:srgbClr val="7E22CE"/>
+          </a:solidFill>
+          <a:ln w="12700">
+            <a:solidFill>
+              <a:srgbClr val="7E22CE"/>
+            </a:solidFill>
+            <a:prstDash val="solid"/>
+          </a:ln>
+        </p:spPr>
+      </p:sp>
+      <p:sp>
+        <p:nvSpPr>
+          <p:cNvPr id="18" name="Shape 16"/>
+          <p:cNvSpPr/>
+          <p:nvPr/>
+        </p:nvSpPr>
+        <p:spPr>
+          <a:xfrm>
+            <a:off x="7122109" y="283464"/>
+            <a:ext cx="45720" cy="45720"/>
+          </a:xfrm>
+          <a:prstGeom prst="rect">
+            <a:avLst/>
+          </a:prstGeom>
+          <a:solidFill>
+            <a:srgbClr val="7E22CE"/>
+          </a:solidFill>
+          <a:ln w="12700">
+            <a:solidFill>
+              <a:srgbClr val="7E22CE"/>
+            </a:solidFill>
+            <a:prstDash val="solid"/>
+          </a:ln>
+        </p:spPr>
+      </p:sp>
+      <p:pic>
+        <p:nvPicPr>
+          <p:cNvPr id="19" name="Image 0" descr="preencoded.png">    </p:cNvPr>
+          <p:cNvPicPr>
+            <a:picLocks noChangeAspect="1"/>
+          </p:cNvPicPr>
+          <p:nvPr/>
+        </p:nvPicPr>
+        <p:blipFill>
+          <a:blip r:embed="rId1"/>
+          <a:stretch>
+            <a:fillRect/>
+          </a:stretch>
+        </p:blipFill>
+        <p:spPr>
+          <a:xfrm>
+            <a:off x="7222693" y="128016"/>
+            <a:ext cx="201168" cy="201168"/>
+          </a:xfrm>
+          <a:prstGeom prst="rect">
+            <a:avLst/>
+          </a:prstGeom>
+        </p:spPr>
+      </p:pic>
+      <p:sp>
+        <p:nvSpPr>
+          <p:cNvPr id="20" name="Text 17"/>
+          <p:cNvSpPr txBox="1"/>
+          <p:nvPr/>
+        </p:nvSpPr>
+        <p:spPr>
+          <a:xfrm>
+            <a:off x="7478725" y="91440"/>
+            <a:ext cx="4127754" cy="274320"/>
+          </a:xfrm>
+          <a:prstGeom prst="rect">
+            <a:avLst/>
+          </a:prstGeom>
+          <a:noFill/>
+          <a:ln/>
+        </p:spPr>
+        <p:txBody>
+          <a:bodyPr wrap="square" lIns="0" tIns="0" rIns="0" bIns="0" rtlCol="0" anchor="ctr"/>
+          <a:lstStyle/>
+          <a:p>
+            <a:pPr indent="0" marL="0">
+              <a:buNone/>
+            </a:pPr>
+            <a:r>
+              <a:rPr lang="en-US" sz="1100" b="1" dirty="0">
+                <a:solidFill>
+                  <a:srgbClr val="6B21A8"/>
+                </a:solidFill>
+                <a:latin typeface="Calibri" pitchFamily="34" charset="0"/>
+                <a:ea typeface="Calibri" pitchFamily="34" charset="-122"/>
+                <a:cs typeface="Calibri" pitchFamily="34" charset="-120"/>
+              </a:rPr>
+              <a:t>DA COMPRENDERE PIÙ AVANTI</a:t>
+            </a:r>
+            <a:pPr indent="0" marL="0">
+              <a:buNone/>
+            </a:pPr>
+            <a:r>
+              <a:rPr lang="en-US" sz="1100" dirty="0">
+                <a:solidFill>
+                  <a:srgbClr val="6B21A8"/>
+                </a:solidFill>
+                <a:latin typeface="Calibri" pitchFamily="34" charset="0"/>
+                <a:ea typeface="Calibri" pitchFamily="34" charset="-122"/>
+                <a:cs typeface="Calibri" pitchFamily="34" charset="-120"/>
+              </a:rPr>
+              <a:t> · i registri</a:t>
+            </a:r>
+            <a:pPr indent="0" marL="0">
+              <a:buNone/>
+            </a:pPr>
+            <a:r>
+              <a:rPr lang="en-US" sz="1100" b="1" dirty="0">
+                <a:solidFill>
+                  <a:srgbClr val="6B21A8"/>
+                </a:solidFill>
+                <a:latin typeface="Calibri" pitchFamily="34" charset="0"/>
+                <a:ea typeface="Calibri" pitchFamily="34" charset="-122"/>
+                <a:cs typeface="Calibri" pitchFamily="34" charset="-120"/>
+              </a:rPr>
+              <a:t> → Lezione 02</a:t>
+            </a:r>
+            <a:endParaRPr lang="en-US" sz="1100" dirty="0"/>
+          </a:p>
+        </p:txBody>
+      </p:sp>
+      <p:sp>
+        <p:nvSpPr>
+          <p:cNvPr id="21" name="Shape 18"/>
+          <p:cNvSpPr/>
+          <p:nvPr/>
+        </p:nvSpPr>
+        <p:spPr>
+          <a:xfrm>
+            <a:off x="3151835" y="91440"/>
+            <a:ext cx="3833114" cy="274320"/>
+          </a:xfrm>
+          <a:prstGeom prst="rect">
+            <a:avLst/>
+          </a:prstGeom>
+          <a:solidFill>
+            <a:srgbClr val="FEF3C7"/>
+          </a:solidFill>
+          <a:ln w="12700">
+            <a:solidFill>
+              <a:srgbClr val="B45309"/>
+            </a:solidFill>
+            <a:prstDash val="solid"/>
+          </a:ln>
+        </p:spPr>
+      </p:sp>
+      <p:sp>
+        <p:nvSpPr>
+          <p:cNvPr id="22" name="Shape 19"/>
+          <p:cNvSpPr/>
+          <p:nvPr/>
+        </p:nvSpPr>
+        <p:spPr>
+          <a:xfrm>
+            <a:off x="3151835" y="91440"/>
+            <a:ext cx="27432" cy="274320"/>
+          </a:xfrm>
+          <a:prstGeom prst="rect">
+            <a:avLst/>
+          </a:prstGeom>
+          <a:solidFill>
+            <a:srgbClr val="B45309"/>
+          </a:solidFill>
+          <a:ln w="12700">
+            <a:solidFill>
+              <a:srgbClr val="B45309"/>
+            </a:solidFill>
+            <a:prstDash val="solid"/>
+          </a:ln>
+        </p:spPr>
+      </p:sp>
+      <p:sp>
+        <p:nvSpPr>
+          <p:cNvPr id="23" name="Shape 20"/>
+          <p:cNvSpPr/>
+          <p:nvPr/>
+        </p:nvSpPr>
+        <p:spPr>
+          <a:xfrm>
+            <a:off x="3206699" y="91440"/>
+            <a:ext cx="27432" cy="274320"/>
+          </a:xfrm>
+          <a:prstGeom prst="rect">
+            <a:avLst/>
+          </a:prstGeom>
+          <a:solidFill>
+            <a:srgbClr val="B45309"/>
+          </a:solidFill>
+          <a:ln w="12700">
+            <a:solidFill>
+              <a:srgbClr val="B45309"/>
+            </a:solidFill>
+            <a:prstDash val="solid"/>
+          </a:ln>
+        </p:spPr>
+      </p:sp>
+      <p:pic>
+        <p:nvPicPr>
+          <p:cNvPr id="24" name="Image 1" descr="preencoded.png">    </p:cNvPr>
+          <p:cNvPicPr>
+            <a:picLocks noChangeAspect="1"/>
+          </p:cNvPicPr>
+          <p:nvPr/>
+        </p:nvPicPr>
+        <p:blipFill>
+          <a:blip r:embed="rId2"/>
+          <a:stretch>
+            <a:fillRect/>
+          </a:stretch>
+        </p:blipFill>
+        <p:spPr>
+          <a:xfrm>
+            <a:off x="3279851" y="128016"/>
+            <a:ext cx="201168" cy="201168"/>
+          </a:xfrm>
+          <a:prstGeom prst="rect">
+            <a:avLst/>
+          </a:prstGeom>
+        </p:spPr>
+      </p:pic>
+      <p:sp>
+        <p:nvSpPr>
+          <p:cNvPr id="25" name="Text 21"/>
+          <p:cNvSpPr txBox="1"/>
+          <p:nvPr/>
+        </p:nvSpPr>
+        <p:spPr>
+          <a:xfrm>
+            <a:off x="3535883" y="91440"/>
+            <a:ext cx="3412490" cy="274320"/>
+          </a:xfrm>
+          <a:prstGeom prst="rect">
+            <a:avLst/>
+          </a:prstGeom>
+          <a:noFill/>
+          <a:ln/>
+        </p:spPr>
+        <p:txBody>
+          <a:bodyPr wrap="square" lIns="0" tIns="0" rIns="0" bIns="0" rtlCol="0" anchor="ctr"/>
+          <a:lstStyle/>
+          <a:p>
+            <a:pPr indent="0" marL="0">
+              <a:buNone/>
+            </a:pPr>
+            <a:r>
+              <a:rPr lang="en-US" sz="1100" b="1" dirty="0">
+                <a:solidFill>
+                  <a:srgbClr val="92400E"/>
+                </a:solidFill>
+                <a:latin typeface="Calibri" pitchFamily="34" charset="0"/>
+                <a:ea typeface="Calibri" pitchFamily="34" charset="-122"/>
+                <a:cs typeface="Calibri" pitchFamily="34" charset="-120"/>
+              </a:rPr>
+              <a:t>DA UTILIZZARE OGGI</a:t>
+            </a:r>
+            <a:pPr indent="0" marL="0">
+              <a:buNone/>
+            </a:pPr>
+            <a:r>
+              <a:rPr lang="en-US" sz="1100" dirty="0">
+                <a:solidFill>
+                  <a:srgbClr val="92400E"/>
+                </a:solidFill>
+                <a:latin typeface="Calibri" pitchFamily="34" charset="0"/>
+                <a:ea typeface="Calibri" pitchFamily="34" charset="-122"/>
+                <a:cs typeface="Calibri" pitchFamily="34" charset="-120"/>
+              </a:rPr>
+              <a:t> · il debugger di PRG32-QT</a:t>
+            </a:r>
+            <a:endParaRPr lang="en-US" sz="1100" dirty="0"/>
+          </a:p>
+        </p:txBody>
+      </p:sp>
+      <p:sp>
+        <p:nvSpPr>
           <p:cNvPr id="25" name="Slide Number Placeholder 0"/>
           <p:cNvSpPr>
             <a:spLocks noGrp="1"/>
@@ -10006,6 +11890,349 @@
       </p:sp>
       <p:sp>
         <p:nvSpPr>
+          <p:cNvPr id="7" name="Shape 4"/>
+          <p:cNvSpPr/>
+          <p:nvPr/>
+        </p:nvSpPr>
+        <p:spPr>
+          <a:xfrm>
+            <a:off x="7094677" y="91440"/>
+            <a:ext cx="4548378" cy="274320"/>
+          </a:xfrm>
+          <a:prstGeom prst="rect">
+            <a:avLst/>
+          </a:prstGeom>
+          <a:solidFill>
+            <a:srgbClr val="F3E8FF"/>
+          </a:solidFill>
+          <a:ln w="12700">
+            <a:solidFill>
+              <a:srgbClr val="7E22CE"/>
+            </a:solidFill>
+            <a:prstDash val="dash"/>
+          </a:ln>
+        </p:spPr>
+      </p:sp>
+      <p:sp>
+        <p:nvSpPr>
+          <p:cNvPr id="8" name="Shape 5"/>
+          <p:cNvSpPr/>
+          <p:nvPr/>
+        </p:nvSpPr>
+        <p:spPr>
+          <a:xfrm>
+            <a:off x="7122109" y="128016"/>
+            <a:ext cx="45720" cy="45720"/>
+          </a:xfrm>
+          <a:prstGeom prst="rect">
+            <a:avLst/>
+          </a:prstGeom>
+          <a:solidFill>
+            <a:srgbClr val="7E22CE"/>
+          </a:solidFill>
+          <a:ln w="12700">
+            <a:solidFill>
+              <a:srgbClr val="7E22CE"/>
+            </a:solidFill>
+            <a:prstDash val="solid"/>
+          </a:ln>
+        </p:spPr>
+      </p:sp>
+      <p:sp>
+        <p:nvSpPr>
+          <p:cNvPr id="9" name="Shape 6"/>
+          <p:cNvSpPr/>
+          <p:nvPr/>
+        </p:nvSpPr>
+        <p:spPr>
+          <a:xfrm>
+            <a:off x="7122109" y="205740"/>
+            <a:ext cx="45720" cy="45720"/>
+          </a:xfrm>
+          <a:prstGeom prst="rect">
+            <a:avLst/>
+          </a:prstGeom>
+          <a:solidFill>
+            <a:srgbClr val="7E22CE"/>
+          </a:solidFill>
+          <a:ln w="12700">
+            <a:solidFill>
+              <a:srgbClr val="7E22CE"/>
+            </a:solidFill>
+            <a:prstDash val="solid"/>
+          </a:ln>
+        </p:spPr>
+      </p:sp>
+      <p:sp>
+        <p:nvSpPr>
+          <p:cNvPr id="10" name="Shape 7"/>
+          <p:cNvSpPr/>
+          <p:nvPr/>
+        </p:nvSpPr>
+        <p:spPr>
+          <a:xfrm>
+            <a:off x="7122109" y="283464"/>
+            <a:ext cx="45720" cy="45720"/>
+          </a:xfrm>
+          <a:prstGeom prst="rect">
+            <a:avLst/>
+          </a:prstGeom>
+          <a:solidFill>
+            <a:srgbClr val="7E22CE"/>
+          </a:solidFill>
+          <a:ln w="12700">
+            <a:solidFill>
+              <a:srgbClr val="7E22CE"/>
+            </a:solidFill>
+            <a:prstDash val="solid"/>
+          </a:ln>
+        </p:spPr>
+      </p:sp>
+      <p:pic>
+        <p:nvPicPr>
+          <p:cNvPr id="11" name="Image 1" descr="preencoded.png">    </p:cNvPr>
+          <p:cNvPicPr>
+            <a:picLocks noChangeAspect="1"/>
+          </p:cNvPicPr>
+          <p:nvPr/>
+        </p:nvPicPr>
+        <p:blipFill>
+          <a:blip r:embed="rId2"/>
+          <a:stretch>
+            <a:fillRect/>
+          </a:stretch>
+        </p:blipFill>
+        <p:spPr>
+          <a:xfrm>
+            <a:off x="7222693" y="128016"/>
+            <a:ext cx="201168" cy="201168"/>
+          </a:xfrm>
+          <a:prstGeom prst="rect">
+            <a:avLst/>
+          </a:prstGeom>
+        </p:spPr>
+      </p:pic>
+      <p:sp>
+        <p:nvSpPr>
+          <p:cNvPr id="12" name="Text 8"/>
+          <p:cNvSpPr txBox="1"/>
+          <p:nvPr/>
+        </p:nvSpPr>
+        <p:spPr>
+          <a:xfrm>
+            <a:off x="7478725" y="91440"/>
+            <a:ext cx="4127754" cy="274320"/>
+          </a:xfrm>
+          <a:prstGeom prst="rect">
+            <a:avLst/>
+          </a:prstGeom>
+          <a:noFill/>
+          <a:ln/>
+        </p:spPr>
+        <p:txBody>
+          <a:bodyPr wrap="square" lIns="0" tIns="0" rIns="0" bIns="0" rtlCol="0" anchor="ctr"/>
+          <a:lstStyle/>
+          <a:p>
+            <a:pPr indent="0" marL="0">
+              <a:buNone/>
+            </a:pPr>
+            <a:r>
+              <a:rPr lang="en-US" sz="1100" b="1" dirty="0">
+                <a:solidFill>
+                  <a:srgbClr val="6B21A8"/>
+                </a:solidFill>
+                <a:latin typeface="Calibri" pitchFamily="34" charset="0"/>
+                <a:ea typeface="Calibri" pitchFamily="34" charset="-122"/>
+                <a:cs typeface="Calibri" pitchFamily="34" charset="-120"/>
+              </a:rPr>
+              <a:t>DA COMPRENDERE PIÙ AVANTI</a:t>
+            </a:r>
+            <a:pPr indent="0" marL="0">
+              <a:buNone/>
+            </a:pPr>
+            <a:r>
+              <a:rPr lang="en-US" sz="1100" dirty="0">
+                <a:solidFill>
+                  <a:srgbClr val="6B21A8"/>
+                </a:solidFill>
+                <a:latin typeface="Calibri" pitchFamily="34" charset="0"/>
+                <a:ea typeface="Calibri" pitchFamily="34" charset="-122"/>
+                <a:cs typeface="Calibri" pitchFamily="34" charset="-120"/>
+              </a:rPr>
+              <a:t> · i registri</a:t>
+            </a:r>
+            <a:pPr indent="0" marL="0">
+              <a:buNone/>
+            </a:pPr>
+            <a:r>
+              <a:rPr lang="en-US" sz="1100" b="1" dirty="0">
+                <a:solidFill>
+                  <a:srgbClr val="6B21A8"/>
+                </a:solidFill>
+                <a:latin typeface="Calibri" pitchFamily="34" charset="0"/>
+                <a:ea typeface="Calibri" pitchFamily="34" charset="-122"/>
+                <a:cs typeface="Calibri" pitchFamily="34" charset="-120"/>
+              </a:rPr>
+              <a:t> → Lezione 02</a:t>
+            </a:r>
+            <a:endParaRPr lang="en-US" sz="1100" dirty="0"/>
+          </a:p>
+        </p:txBody>
+      </p:sp>
+      <p:sp>
+        <p:nvSpPr>
+          <p:cNvPr id="13" name="Shape 9"/>
+          <p:cNvSpPr/>
+          <p:nvPr/>
+        </p:nvSpPr>
+        <p:spPr>
+          <a:xfrm>
+            <a:off x="3151835" y="91440"/>
+            <a:ext cx="3833114" cy="274320"/>
+          </a:xfrm>
+          <a:prstGeom prst="rect">
+            <a:avLst/>
+          </a:prstGeom>
+          <a:solidFill>
+            <a:srgbClr val="FEF3C7"/>
+          </a:solidFill>
+          <a:ln w="12700">
+            <a:solidFill>
+              <a:srgbClr val="B45309"/>
+            </a:solidFill>
+            <a:prstDash val="solid"/>
+          </a:ln>
+        </p:spPr>
+      </p:sp>
+      <p:sp>
+        <p:nvSpPr>
+          <p:cNvPr id="14" name="Shape 10"/>
+          <p:cNvSpPr/>
+          <p:nvPr/>
+        </p:nvSpPr>
+        <p:spPr>
+          <a:xfrm>
+            <a:off x="3151835" y="91440"/>
+            <a:ext cx="27432" cy="274320"/>
+          </a:xfrm>
+          <a:prstGeom prst="rect">
+            <a:avLst/>
+          </a:prstGeom>
+          <a:solidFill>
+            <a:srgbClr val="B45309"/>
+          </a:solidFill>
+          <a:ln w="12700">
+            <a:solidFill>
+              <a:srgbClr val="B45309"/>
+            </a:solidFill>
+            <a:prstDash val="solid"/>
+          </a:ln>
+        </p:spPr>
+      </p:sp>
+      <p:sp>
+        <p:nvSpPr>
+          <p:cNvPr id="15" name="Shape 11"/>
+          <p:cNvSpPr/>
+          <p:nvPr/>
+        </p:nvSpPr>
+        <p:spPr>
+          <a:xfrm>
+            <a:off x="3206699" y="91440"/>
+            <a:ext cx="27432" cy="274320"/>
+          </a:xfrm>
+          <a:prstGeom prst="rect">
+            <a:avLst/>
+          </a:prstGeom>
+          <a:solidFill>
+            <a:srgbClr val="B45309"/>
+          </a:solidFill>
+          <a:ln w="12700">
+            <a:solidFill>
+              <a:srgbClr val="B45309"/>
+            </a:solidFill>
+            <a:prstDash val="solid"/>
+          </a:ln>
+        </p:spPr>
+      </p:sp>
+      <p:pic>
+        <p:nvPicPr>
+          <p:cNvPr id="16" name="Image 2" descr="preencoded.png">    </p:cNvPr>
+          <p:cNvPicPr>
+            <a:picLocks noChangeAspect="1"/>
+          </p:cNvPicPr>
+          <p:nvPr/>
+        </p:nvPicPr>
+        <p:blipFill>
+          <a:blip r:embed="rId3"/>
+          <a:stretch>
+            <a:fillRect/>
+          </a:stretch>
+        </p:blipFill>
+        <p:spPr>
+          <a:xfrm>
+            <a:off x="3279851" y="128016"/>
+            <a:ext cx="201168" cy="201168"/>
+          </a:xfrm>
+          <a:prstGeom prst="rect">
+            <a:avLst/>
+          </a:prstGeom>
+        </p:spPr>
+      </p:pic>
+      <p:sp>
+        <p:nvSpPr>
+          <p:cNvPr id="17" name="Text 12"/>
+          <p:cNvSpPr txBox="1"/>
+          <p:nvPr/>
+        </p:nvSpPr>
+        <p:spPr>
+          <a:xfrm>
+            <a:off x="3535883" y="91440"/>
+            <a:ext cx="3412490" cy="274320"/>
+          </a:xfrm>
+          <a:prstGeom prst="rect">
+            <a:avLst/>
+          </a:prstGeom>
+          <a:noFill/>
+          <a:ln/>
+        </p:spPr>
+        <p:txBody>
+          <a:bodyPr wrap="square" lIns="0" tIns="0" rIns="0" bIns="0" rtlCol="0" anchor="ctr"/>
+          <a:lstStyle/>
+          <a:p>
+            <a:pPr indent="0" marL="0">
+              <a:buNone/>
+            </a:pPr>
+            <a:r>
+              <a:rPr lang="en-US" sz="1100" b="1" dirty="0">
+                <a:solidFill>
+                  <a:srgbClr val="92400E"/>
+                </a:solidFill>
+                <a:latin typeface="Calibri" pitchFamily="34" charset="0"/>
+                <a:ea typeface="Calibri" pitchFamily="34" charset="-122"/>
+                <a:cs typeface="Calibri" pitchFamily="34" charset="-120"/>
+              </a:rPr>
+              <a:t>DA UTILIZZARE OGGI</a:t>
+            </a:r>
+            <a:pPr indent="0" marL="0">
+              <a:buNone/>
+            </a:pPr>
+            <a:r>
+              <a:rPr lang="en-US" sz="1100" dirty="0">
+                <a:solidFill>
+                  <a:srgbClr val="92400E"/>
+                </a:solidFill>
+                <a:latin typeface="Calibri" pitchFamily="34" charset="0"/>
+                <a:ea typeface="Calibri" pitchFamily="34" charset="-122"/>
+                <a:cs typeface="Calibri" pitchFamily="34" charset="-120"/>
+              </a:rPr>
+              <a:t> · il debugger di PRG32-QT</a:t>
+            </a:r>
+            <a:endParaRPr lang="en-US" sz="1100" dirty="0"/>
+          </a:p>
+        </p:txBody>
+      </p:sp>
+      <p:sp>
+        <p:nvSpPr>
           <p:cNvPr id="25" name="Slide Number Placeholder 0"/>
           <p:cNvSpPr>
             <a:spLocks noGrp="1"/>
@@ -10870,6 +13097,158 @@
       </p:sp>
       <p:sp>
         <p:nvSpPr>
+          <p:cNvPr id="17" name="Shape 15"/>
+          <p:cNvSpPr/>
+          <p:nvPr/>
+        </p:nvSpPr>
+        <p:spPr>
+          <a:xfrm>
+            <a:off x="7875600" y="91440"/>
+            <a:ext cx="3767455" cy="274320"/>
+          </a:xfrm>
+          <a:prstGeom prst="rect">
+            <a:avLst/>
+          </a:prstGeom>
+          <a:solidFill>
+            <a:srgbClr val="FEF3C7"/>
+          </a:solidFill>
+          <a:ln w="12700">
+            <a:solidFill>
+              <a:srgbClr val="B45309"/>
+            </a:solidFill>
+            <a:prstDash val="solid"/>
+          </a:ln>
+        </p:spPr>
+      </p:sp>
+      <p:sp>
+        <p:nvSpPr>
+          <p:cNvPr id="18" name="Shape 16"/>
+          <p:cNvSpPr/>
+          <p:nvPr/>
+        </p:nvSpPr>
+        <p:spPr>
+          <a:xfrm>
+            <a:off x="7875600" y="91440"/>
+            <a:ext cx="27432" cy="274320"/>
+          </a:xfrm>
+          <a:prstGeom prst="rect">
+            <a:avLst/>
+          </a:prstGeom>
+          <a:solidFill>
+            <a:srgbClr val="B45309"/>
+          </a:solidFill>
+          <a:ln w="12700">
+            <a:solidFill>
+              <a:srgbClr val="B45309"/>
+            </a:solidFill>
+            <a:prstDash val="solid"/>
+          </a:ln>
+        </p:spPr>
+      </p:sp>
+      <p:sp>
+        <p:nvSpPr>
+          <p:cNvPr id="19" name="Shape 17"/>
+          <p:cNvSpPr/>
+          <p:nvPr/>
+        </p:nvSpPr>
+        <p:spPr>
+          <a:xfrm>
+            <a:off x="7930464" y="91440"/>
+            <a:ext cx="27432" cy="274320"/>
+          </a:xfrm>
+          <a:prstGeom prst="rect">
+            <a:avLst/>
+          </a:prstGeom>
+          <a:solidFill>
+            <a:srgbClr val="B45309"/>
+          </a:solidFill>
+          <a:ln w="12700">
+            <a:solidFill>
+              <a:srgbClr val="B45309"/>
+            </a:solidFill>
+            <a:prstDash val="solid"/>
+          </a:ln>
+        </p:spPr>
+      </p:sp>
+      <p:pic>
+        <p:nvPicPr>
+          <p:cNvPr id="20" name="Image 0" descr="preencoded.png">    </p:cNvPr>
+          <p:cNvPicPr>
+            <a:picLocks noChangeAspect="1"/>
+          </p:cNvPicPr>
+          <p:nvPr/>
+        </p:nvPicPr>
+        <p:blipFill>
+          <a:blip r:embed="rId1"/>
+          <a:stretch>
+            <a:fillRect/>
+          </a:stretch>
+        </p:blipFill>
+        <p:spPr>
+          <a:xfrm>
+            <a:off x="8003616" y="128016"/>
+            <a:ext cx="201168" cy="201168"/>
+          </a:xfrm>
+          <a:prstGeom prst="rect">
+            <a:avLst/>
+          </a:prstGeom>
+        </p:spPr>
+      </p:pic>
+      <p:sp>
+        <p:nvSpPr>
+          <p:cNvPr id="21" name="Text 18"/>
+          <p:cNvSpPr txBox="1"/>
+          <p:nvPr/>
+        </p:nvSpPr>
+        <p:spPr>
+          <a:xfrm>
+            <a:off x="8259648" y="91440"/>
+            <a:ext cx="3346831" cy="274320"/>
+          </a:xfrm>
+          <a:prstGeom prst="rect">
+            <a:avLst/>
+          </a:prstGeom>
+          <a:noFill/>
+          <a:ln/>
+        </p:spPr>
+        <p:txBody>
+          <a:bodyPr wrap="square" lIns="0" tIns="0" rIns="0" bIns="0" rtlCol="0" anchor="ctr"/>
+          <a:lstStyle/>
+          <a:p>
+            <a:pPr indent="0" marL="0">
+              <a:buNone/>
+            </a:pPr>
+            <a:r>
+              <a:rPr lang="en-US" sz="1100" b="1" dirty="0">
+                <a:solidFill>
+                  <a:srgbClr val="92400E"/>
+                </a:solidFill>
+                <a:latin typeface="Calibri" pitchFamily="34" charset="0"/>
+                <a:ea typeface="Calibri" pitchFamily="34" charset="-122"/>
+                <a:cs typeface="Calibri" pitchFamily="34" charset="-120"/>
+              </a:rPr>
+              <a:t>DA UTILIZZARE OGGI</a:t>
+            </a:r>
+            <a:pPr indent="0" marL="0">
+              <a:buNone/>
+            </a:pPr>
+            <a:r>
+              <a:rPr lang="en-US" sz="1100" dirty="0">
+                <a:solidFill>
+                  <a:srgbClr val="92400E"/>
+                </a:solidFill>
+                <a:latin typeface="Calibri" pitchFamily="34" charset="0"/>
+                <a:ea typeface="Calibri" pitchFamily="34" charset="-122"/>
+                <a:cs typeface="Calibri" pitchFamily="34" charset="-120"/>
+              </a:rPr>
+              <a:t> · gli strumenti di PRG32</a:t>
+            </a:r>
+            <a:endParaRPr lang="en-US" sz="1100" dirty="0"/>
+          </a:p>
+        </p:txBody>
+      </p:sp>
+      <p:sp>
+        <p:nvSpPr>
           <p:cNvPr id="25" name="Slide Number Placeholder 0"/>
           <p:cNvSpPr>
             <a:spLocks noGrp="1"/>
@@ -11672,6 +14051,158 @@
       </p:sp>
       <p:sp>
         <p:nvSpPr>
+          <p:cNvPr id="17" name="Shape 15"/>
+          <p:cNvSpPr/>
+          <p:nvPr/>
+        </p:nvSpPr>
+        <p:spPr>
+          <a:xfrm>
+            <a:off x="7875600" y="91440"/>
+            <a:ext cx="3767455" cy="274320"/>
+          </a:xfrm>
+          <a:prstGeom prst="rect">
+            <a:avLst/>
+          </a:prstGeom>
+          <a:solidFill>
+            <a:srgbClr val="FEF3C7"/>
+          </a:solidFill>
+          <a:ln w="12700">
+            <a:solidFill>
+              <a:srgbClr val="B45309"/>
+            </a:solidFill>
+            <a:prstDash val="solid"/>
+          </a:ln>
+        </p:spPr>
+      </p:sp>
+      <p:sp>
+        <p:nvSpPr>
+          <p:cNvPr id="18" name="Shape 16"/>
+          <p:cNvSpPr/>
+          <p:nvPr/>
+        </p:nvSpPr>
+        <p:spPr>
+          <a:xfrm>
+            <a:off x="7875600" y="91440"/>
+            <a:ext cx="27432" cy="274320"/>
+          </a:xfrm>
+          <a:prstGeom prst="rect">
+            <a:avLst/>
+          </a:prstGeom>
+          <a:solidFill>
+            <a:srgbClr val="B45309"/>
+          </a:solidFill>
+          <a:ln w="12700">
+            <a:solidFill>
+              <a:srgbClr val="B45309"/>
+            </a:solidFill>
+            <a:prstDash val="solid"/>
+          </a:ln>
+        </p:spPr>
+      </p:sp>
+      <p:sp>
+        <p:nvSpPr>
+          <p:cNvPr id="19" name="Shape 17"/>
+          <p:cNvSpPr/>
+          <p:nvPr/>
+        </p:nvSpPr>
+        <p:spPr>
+          <a:xfrm>
+            <a:off x="7930464" y="91440"/>
+            <a:ext cx="27432" cy="274320"/>
+          </a:xfrm>
+          <a:prstGeom prst="rect">
+            <a:avLst/>
+          </a:prstGeom>
+          <a:solidFill>
+            <a:srgbClr val="B45309"/>
+          </a:solidFill>
+          <a:ln w="12700">
+            <a:solidFill>
+              <a:srgbClr val="B45309"/>
+            </a:solidFill>
+            <a:prstDash val="solid"/>
+          </a:ln>
+        </p:spPr>
+      </p:sp>
+      <p:pic>
+        <p:nvPicPr>
+          <p:cNvPr id="20" name="Image 0" descr="preencoded.png">    </p:cNvPr>
+          <p:cNvPicPr>
+            <a:picLocks noChangeAspect="1"/>
+          </p:cNvPicPr>
+          <p:nvPr/>
+        </p:nvPicPr>
+        <p:blipFill>
+          <a:blip r:embed="rId1"/>
+          <a:stretch>
+            <a:fillRect/>
+          </a:stretch>
+        </p:blipFill>
+        <p:spPr>
+          <a:xfrm>
+            <a:off x="8003616" y="128016"/>
+            <a:ext cx="201168" cy="201168"/>
+          </a:xfrm>
+          <a:prstGeom prst="rect">
+            <a:avLst/>
+          </a:prstGeom>
+        </p:spPr>
+      </p:pic>
+      <p:sp>
+        <p:nvSpPr>
+          <p:cNvPr id="21" name="Text 18"/>
+          <p:cNvSpPr txBox="1"/>
+          <p:nvPr/>
+        </p:nvSpPr>
+        <p:spPr>
+          <a:xfrm>
+            <a:off x="8259648" y="91440"/>
+            <a:ext cx="3346831" cy="274320"/>
+          </a:xfrm>
+          <a:prstGeom prst="rect">
+            <a:avLst/>
+          </a:prstGeom>
+          <a:noFill/>
+          <a:ln/>
+        </p:spPr>
+        <p:txBody>
+          <a:bodyPr wrap="square" lIns="0" tIns="0" rIns="0" bIns="0" rtlCol="0" anchor="ctr"/>
+          <a:lstStyle/>
+          <a:p>
+            <a:pPr indent="0" marL="0">
+              <a:buNone/>
+            </a:pPr>
+            <a:r>
+              <a:rPr lang="en-US" sz="1100" b="1" dirty="0">
+                <a:solidFill>
+                  <a:srgbClr val="92400E"/>
+                </a:solidFill>
+                <a:latin typeface="Calibri" pitchFamily="34" charset="0"/>
+                <a:ea typeface="Calibri" pitchFamily="34" charset="-122"/>
+                <a:cs typeface="Calibri" pitchFamily="34" charset="-120"/>
+              </a:rPr>
+              <a:t>DA UTILIZZARE OGGI</a:t>
+            </a:r>
+            <a:pPr indent="0" marL="0">
+              <a:buNone/>
+            </a:pPr>
+            <a:r>
+              <a:rPr lang="en-US" sz="1100" dirty="0">
+                <a:solidFill>
+                  <a:srgbClr val="92400E"/>
+                </a:solidFill>
+                <a:latin typeface="Calibri" pitchFamily="34" charset="0"/>
+                <a:ea typeface="Calibri" pitchFamily="34" charset="-122"/>
+                <a:cs typeface="Calibri" pitchFamily="34" charset="-120"/>
+              </a:rPr>
+              <a:t> · gli strumenti di PRG32</a:t>
+            </a:r>
+            <a:endParaRPr lang="en-US" sz="1100" dirty="0"/>
+          </a:p>
+        </p:txBody>
+      </p:sp>
+      <p:sp>
+        <p:nvSpPr>
           <p:cNvPr id="25" name="Slide Number Placeholder 0"/>
           <p:cNvSpPr>
             <a:spLocks noGrp="1"/>
@@ -12768,6 +15299,158 @@
       </p:sp>
       <p:sp>
         <p:nvSpPr>
+          <p:cNvPr id="5" name="Shape 3"/>
+          <p:cNvSpPr/>
+          <p:nvPr/>
+        </p:nvSpPr>
+        <p:spPr>
+          <a:xfrm>
+            <a:off x="7941259" y="91440"/>
+            <a:ext cx="3701796" cy="274320"/>
+          </a:xfrm>
+          <a:prstGeom prst="rect">
+            <a:avLst/>
+          </a:prstGeom>
+          <a:solidFill>
+            <a:srgbClr val="FEF3C7"/>
+          </a:solidFill>
+          <a:ln w="12700">
+            <a:solidFill>
+              <a:srgbClr val="B45309"/>
+            </a:solidFill>
+            <a:prstDash val="solid"/>
+          </a:ln>
+        </p:spPr>
+      </p:sp>
+      <p:sp>
+        <p:nvSpPr>
+          <p:cNvPr id="6" name="Shape 4"/>
+          <p:cNvSpPr/>
+          <p:nvPr/>
+        </p:nvSpPr>
+        <p:spPr>
+          <a:xfrm>
+            <a:off x="7941259" y="91440"/>
+            <a:ext cx="27432" cy="274320"/>
+          </a:xfrm>
+          <a:prstGeom prst="rect">
+            <a:avLst/>
+          </a:prstGeom>
+          <a:solidFill>
+            <a:srgbClr val="B45309"/>
+          </a:solidFill>
+          <a:ln w="12700">
+            <a:solidFill>
+              <a:srgbClr val="B45309"/>
+            </a:solidFill>
+            <a:prstDash val="solid"/>
+          </a:ln>
+        </p:spPr>
+      </p:sp>
+      <p:sp>
+        <p:nvSpPr>
+          <p:cNvPr id="7" name="Shape 5"/>
+          <p:cNvSpPr/>
+          <p:nvPr/>
+        </p:nvSpPr>
+        <p:spPr>
+          <a:xfrm>
+            <a:off x="7996123" y="91440"/>
+            <a:ext cx="27432" cy="274320"/>
+          </a:xfrm>
+          <a:prstGeom prst="rect">
+            <a:avLst/>
+          </a:prstGeom>
+          <a:solidFill>
+            <a:srgbClr val="B45309"/>
+          </a:solidFill>
+          <a:ln w="12700">
+            <a:solidFill>
+              <a:srgbClr val="B45309"/>
+            </a:solidFill>
+            <a:prstDash val="solid"/>
+          </a:ln>
+        </p:spPr>
+      </p:sp>
+      <p:pic>
+        <p:nvPicPr>
+          <p:cNvPr id="8" name="Image 0" descr="preencoded.png">    </p:cNvPr>
+          <p:cNvPicPr>
+            <a:picLocks noChangeAspect="1"/>
+          </p:cNvPicPr>
+          <p:nvPr/>
+        </p:nvPicPr>
+        <p:blipFill>
+          <a:blip r:embed="rId1"/>
+          <a:stretch>
+            <a:fillRect/>
+          </a:stretch>
+        </p:blipFill>
+        <p:spPr>
+          <a:xfrm>
+            <a:off x="8069275" y="128016"/>
+            <a:ext cx="201168" cy="201168"/>
+          </a:xfrm>
+          <a:prstGeom prst="rect">
+            <a:avLst/>
+          </a:prstGeom>
+        </p:spPr>
+      </p:pic>
+      <p:sp>
+        <p:nvSpPr>
+          <p:cNvPr id="9" name="Text 6"/>
+          <p:cNvSpPr txBox="1"/>
+          <p:nvPr/>
+        </p:nvSpPr>
+        <p:spPr>
+          <a:xfrm>
+            <a:off x="8325307" y="91440"/>
+            <a:ext cx="3281172" cy="274320"/>
+          </a:xfrm>
+          <a:prstGeom prst="rect">
+            <a:avLst/>
+          </a:prstGeom>
+          <a:noFill/>
+          <a:ln/>
+        </p:spPr>
+        <p:txBody>
+          <a:bodyPr wrap="square" lIns="0" tIns="0" rIns="0" bIns="0" rtlCol="0" anchor="ctr"/>
+          <a:lstStyle/>
+          <a:p>
+            <a:pPr indent="0" marL="0">
+              <a:buNone/>
+            </a:pPr>
+            <a:r>
+              <a:rPr lang="en-US" sz="1100" b="1" dirty="0">
+                <a:solidFill>
+                  <a:srgbClr val="92400E"/>
+                </a:solidFill>
+                <a:latin typeface="Calibri" pitchFamily="34" charset="0"/>
+                <a:ea typeface="Calibri" pitchFamily="34" charset="-122"/>
+                <a:cs typeface="Calibri" pitchFamily="34" charset="-120"/>
+              </a:rPr>
+              <a:t>DA UTILIZZARE OGGI</a:t>
+            </a:r>
+            <a:pPr indent="0" marL="0">
+              <a:buNone/>
+            </a:pPr>
+            <a:r>
+              <a:rPr lang="en-US" sz="1100" dirty="0">
+                <a:solidFill>
+                  <a:srgbClr val="92400E"/>
+                </a:solidFill>
+                <a:latin typeface="Calibri" pitchFamily="34" charset="0"/>
+                <a:ea typeface="Calibri" pitchFamily="34" charset="-122"/>
+                <a:cs typeface="Calibri" pitchFamily="34" charset="-120"/>
+              </a:rPr>
+              <a:t> · il programma completo</a:t>
+            </a:r>
+            <a:endParaRPr lang="en-US" sz="1100" dirty="0"/>
+          </a:p>
+        </p:txBody>
+      </p:sp>
+      <p:sp>
+        <p:nvSpPr>
           <p:cNvPr id="25" name="Slide Number Placeholder 0"/>
           <p:cNvSpPr>
             <a:spLocks noGrp="1"/>
@@ -13465,6 +16148,158 @@
       </p:sp>
       <p:sp>
         <p:nvSpPr>
+          <p:cNvPr id="5" name="Shape 3"/>
+          <p:cNvSpPr/>
+          <p:nvPr/>
+        </p:nvSpPr>
+        <p:spPr>
+          <a:xfrm>
+            <a:off x="7941259" y="91440"/>
+            <a:ext cx="3701796" cy="274320"/>
+          </a:xfrm>
+          <a:prstGeom prst="rect">
+            <a:avLst/>
+          </a:prstGeom>
+          <a:solidFill>
+            <a:srgbClr val="FEF3C7"/>
+          </a:solidFill>
+          <a:ln w="12700">
+            <a:solidFill>
+              <a:srgbClr val="B45309"/>
+            </a:solidFill>
+            <a:prstDash val="solid"/>
+          </a:ln>
+        </p:spPr>
+      </p:sp>
+      <p:sp>
+        <p:nvSpPr>
+          <p:cNvPr id="6" name="Shape 4"/>
+          <p:cNvSpPr/>
+          <p:nvPr/>
+        </p:nvSpPr>
+        <p:spPr>
+          <a:xfrm>
+            <a:off x="7941259" y="91440"/>
+            <a:ext cx="27432" cy="274320"/>
+          </a:xfrm>
+          <a:prstGeom prst="rect">
+            <a:avLst/>
+          </a:prstGeom>
+          <a:solidFill>
+            <a:srgbClr val="B45309"/>
+          </a:solidFill>
+          <a:ln w="12700">
+            <a:solidFill>
+              <a:srgbClr val="B45309"/>
+            </a:solidFill>
+            <a:prstDash val="solid"/>
+          </a:ln>
+        </p:spPr>
+      </p:sp>
+      <p:sp>
+        <p:nvSpPr>
+          <p:cNvPr id="7" name="Shape 5"/>
+          <p:cNvSpPr/>
+          <p:nvPr/>
+        </p:nvSpPr>
+        <p:spPr>
+          <a:xfrm>
+            <a:off x="7996123" y="91440"/>
+            <a:ext cx="27432" cy="274320"/>
+          </a:xfrm>
+          <a:prstGeom prst="rect">
+            <a:avLst/>
+          </a:prstGeom>
+          <a:solidFill>
+            <a:srgbClr val="B45309"/>
+          </a:solidFill>
+          <a:ln w="12700">
+            <a:solidFill>
+              <a:srgbClr val="B45309"/>
+            </a:solidFill>
+            <a:prstDash val="solid"/>
+          </a:ln>
+        </p:spPr>
+      </p:sp>
+      <p:pic>
+        <p:nvPicPr>
+          <p:cNvPr id="8" name="Image 0" descr="preencoded.png">    </p:cNvPr>
+          <p:cNvPicPr>
+            <a:picLocks noChangeAspect="1"/>
+          </p:cNvPicPr>
+          <p:nvPr/>
+        </p:nvPicPr>
+        <p:blipFill>
+          <a:blip r:embed="rId1"/>
+          <a:stretch>
+            <a:fillRect/>
+          </a:stretch>
+        </p:blipFill>
+        <p:spPr>
+          <a:xfrm>
+            <a:off x="8069275" y="128016"/>
+            <a:ext cx="201168" cy="201168"/>
+          </a:xfrm>
+          <a:prstGeom prst="rect">
+            <a:avLst/>
+          </a:prstGeom>
+        </p:spPr>
+      </p:pic>
+      <p:sp>
+        <p:nvSpPr>
+          <p:cNvPr id="9" name="Text 6"/>
+          <p:cNvSpPr txBox="1"/>
+          <p:nvPr/>
+        </p:nvSpPr>
+        <p:spPr>
+          <a:xfrm>
+            <a:off x="8325307" y="91440"/>
+            <a:ext cx="3281172" cy="274320"/>
+          </a:xfrm>
+          <a:prstGeom prst="rect">
+            <a:avLst/>
+          </a:prstGeom>
+          <a:noFill/>
+          <a:ln/>
+        </p:spPr>
+        <p:txBody>
+          <a:bodyPr wrap="square" lIns="0" tIns="0" rIns="0" bIns="0" rtlCol="0" anchor="ctr"/>
+          <a:lstStyle/>
+          <a:p>
+            <a:pPr indent="0" marL="0">
+              <a:buNone/>
+            </a:pPr>
+            <a:r>
+              <a:rPr lang="en-US" sz="1100" b="1" dirty="0">
+                <a:solidFill>
+                  <a:srgbClr val="92400E"/>
+                </a:solidFill>
+                <a:latin typeface="Calibri" pitchFamily="34" charset="0"/>
+                <a:ea typeface="Calibri" pitchFamily="34" charset="-122"/>
+                <a:cs typeface="Calibri" pitchFamily="34" charset="-120"/>
+              </a:rPr>
+              <a:t>DA UTILIZZARE OGGI</a:t>
+            </a:r>
+            <a:pPr indent="0" marL="0">
+              <a:buNone/>
+            </a:pPr>
+            <a:r>
+              <a:rPr lang="en-US" sz="1100" dirty="0">
+                <a:solidFill>
+                  <a:srgbClr val="92400E"/>
+                </a:solidFill>
+                <a:latin typeface="Calibri" pitchFamily="34" charset="0"/>
+                <a:ea typeface="Calibri" pitchFamily="34" charset="-122"/>
+                <a:cs typeface="Calibri" pitchFamily="34" charset="-120"/>
+              </a:rPr>
+              <a:t> · il programma completo</a:t>
+            </a:r>
+            <a:endParaRPr lang="en-US" sz="1100" dirty="0"/>
+          </a:p>
+        </p:txBody>
+      </p:sp>
+      <p:sp>
+        <p:nvSpPr>
           <p:cNvPr id="25" name="Slide Number Placeholder 0"/>
           <p:cNvSpPr>
             <a:spLocks noGrp="1"/>
@@ -13812,6 +16647,158 @@
       </p:sp>
       <p:sp>
         <p:nvSpPr>
+          <p:cNvPr id="5" name="Shape 3"/>
+          <p:cNvSpPr/>
+          <p:nvPr/>
+        </p:nvSpPr>
+        <p:spPr>
+          <a:xfrm>
+            <a:off x="7941259" y="91440"/>
+            <a:ext cx="3701796" cy="274320"/>
+          </a:xfrm>
+          <a:prstGeom prst="rect">
+            <a:avLst/>
+          </a:prstGeom>
+          <a:solidFill>
+            <a:srgbClr val="FEF3C7"/>
+          </a:solidFill>
+          <a:ln w="12700">
+            <a:solidFill>
+              <a:srgbClr val="B45309"/>
+            </a:solidFill>
+            <a:prstDash val="solid"/>
+          </a:ln>
+        </p:spPr>
+      </p:sp>
+      <p:sp>
+        <p:nvSpPr>
+          <p:cNvPr id="6" name="Shape 4"/>
+          <p:cNvSpPr/>
+          <p:nvPr/>
+        </p:nvSpPr>
+        <p:spPr>
+          <a:xfrm>
+            <a:off x="7941259" y="91440"/>
+            <a:ext cx="27432" cy="274320"/>
+          </a:xfrm>
+          <a:prstGeom prst="rect">
+            <a:avLst/>
+          </a:prstGeom>
+          <a:solidFill>
+            <a:srgbClr val="B45309"/>
+          </a:solidFill>
+          <a:ln w="12700">
+            <a:solidFill>
+              <a:srgbClr val="B45309"/>
+            </a:solidFill>
+            <a:prstDash val="solid"/>
+          </a:ln>
+        </p:spPr>
+      </p:sp>
+      <p:sp>
+        <p:nvSpPr>
+          <p:cNvPr id="7" name="Shape 5"/>
+          <p:cNvSpPr/>
+          <p:nvPr/>
+        </p:nvSpPr>
+        <p:spPr>
+          <a:xfrm>
+            <a:off x="7996123" y="91440"/>
+            <a:ext cx="27432" cy="274320"/>
+          </a:xfrm>
+          <a:prstGeom prst="rect">
+            <a:avLst/>
+          </a:prstGeom>
+          <a:solidFill>
+            <a:srgbClr val="B45309"/>
+          </a:solidFill>
+          <a:ln w="12700">
+            <a:solidFill>
+              <a:srgbClr val="B45309"/>
+            </a:solidFill>
+            <a:prstDash val="solid"/>
+          </a:ln>
+        </p:spPr>
+      </p:sp>
+      <p:pic>
+        <p:nvPicPr>
+          <p:cNvPr id="8" name="Image 0" descr="preencoded.png">    </p:cNvPr>
+          <p:cNvPicPr>
+            <a:picLocks noChangeAspect="1"/>
+          </p:cNvPicPr>
+          <p:nvPr/>
+        </p:nvPicPr>
+        <p:blipFill>
+          <a:blip r:embed="rId1"/>
+          <a:stretch>
+            <a:fillRect/>
+          </a:stretch>
+        </p:blipFill>
+        <p:spPr>
+          <a:xfrm>
+            <a:off x="8069275" y="128016"/>
+            <a:ext cx="201168" cy="201168"/>
+          </a:xfrm>
+          <a:prstGeom prst="rect">
+            <a:avLst/>
+          </a:prstGeom>
+        </p:spPr>
+      </p:pic>
+      <p:sp>
+        <p:nvSpPr>
+          <p:cNvPr id="9" name="Text 6"/>
+          <p:cNvSpPr txBox="1"/>
+          <p:nvPr/>
+        </p:nvSpPr>
+        <p:spPr>
+          <a:xfrm>
+            <a:off x="8325307" y="91440"/>
+            <a:ext cx="3281172" cy="274320"/>
+          </a:xfrm>
+          <a:prstGeom prst="rect">
+            <a:avLst/>
+          </a:prstGeom>
+          <a:noFill/>
+          <a:ln/>
+        </p:spPr>
+        <p:txBody>
+          <a:bodyPr wrap="square" lIns="0" tIns="0" rIns="0" bIns="0" rtlCol="0" anchor="ctr"/>
+          <a:lstStyle/>
+          <a:p>
+            <a:pPr indent="0" marL="0">
+              <a:buNone/>
+            </a:pPr>
+            <a:r>
+              <a:rPr lang="en-US" sz="1100" b="1" dirty="0">
+                <a:solidFill>
+                  <a:srgbClr val="92400E"/>
+                </a:solidFill>
+                <a:latin typeface="Calibri" pitchFamily="34" charset="0"/>
+                <a:ea typeface="Calibri" pitchFamily="34" charset="-122"/>
+                <a:cs typeface="Calibri" pitchFamily="34" charset="-120"/>
+              </a:rPr>
+              <a:t>DA UTILIZZARE OGGI</a:t>
+            </a:r>
+            <a:pPr indent="0" marL="0">
+              <a:buNone/>
+            </a:pPr>
+            <a:r>
+              <a:rPr lang="en-US" sz="1100" dirty="0">
+                <a:solidFill>
+                  <a:srgbClr val="92400E"/>
+                </a:solidFill>
+                <a:latin typeface="Calibri" pitchFamily="34" charset="0"/>
+                <a:ea typeface="Calibri" pitchFamily="34" charset="-122"/>
+                <a:cs typeface="Calibri" pitchFamily="34" charset="-120"/>
+              </a:rPr>
+              <a:t> · il programma completo</a:t>
+            </a:r>
+            <a:endParaRPr lang="en-US" sz="1100" dirty="0"/>
+          </a:p>
+        </p:txBody>
+      </p:sp>
+      <p:sp>
+        <p:nvSpPr>
           <p:cNvPr id="25" name="Slide Number Placeholder 0"/>
           <p:cNvSpPr>
             <a:spLocks noGrp="1"/>
@@ -14965,6 +17952,158 @@
       </p:sp>
       <p:sp>
         <p:nvSpPr>
+          <p:cNvPr id="17" name="Shape 15"/>
+          <p:cNvSpPr/>
+          <p:nvPr/>
+        </p:nvSpPr>
+        <p:spPr>
+          <a:xfrm>
+            <a:off x="7875600" y="91440"/>
+            <a:ext cx="3767455" cy="274320"/>
+          </a:xfrm>
+          <a:prstGeom prst="rect">
+            <a:avLst/>
+          </a:prstGeom>
+          <a:solidFill>
+            <a:srgbClr val="FEF3C7"/>
+          </a:solidFill>
+          <a:ln w="12700">
+            <a:solidFill>
+              <a:srgbClr val="B45309"/>
+            </a:solidFill>
+            <a:prstDash val="solid"/>
+          </a:ln>
+        </p:spPr>
+      </p:sp>
+      <p:sp>
+        <p:nvSpPr>
+          <p:cNvPr id="18" name="Shape 16"/>
+          <p:cNvSpPr/>
+          <p:nvPr/>
+        </p:nvSpPr>
+        <p:spPr>
+          <a:xfrm>
+            <a:off x="7875600" y="91440"/>
+            <a:ext cx="27432" cy="274320"/>
+          </a:xfrm>
+          <a:prstGeom prst="rect">
+            <a:avLst/>
+          </a:prstGeom>
+          <a:solidFill>
+            <a:srgbClr val="B45309"/>
+          </a:solidFill>
+          <a:ln w="12700">
+            <a:solidFill>
+              <a:srgbClr val="B45309"/>
+            </a:solidFill>
+            <a:prstDash val="solid"/>
+          </a:ln>
+        </p:spPr>
+      </p:sp>
+      <p:sp>
+        <p:nvSpPr>
+          <p:cNvPr id="19" name="Shape 17"/>
+          <p:cNvSpPr/>
+          <p:nvPr/>
+        </p:nvSpPr>
+        <p:spPr>
+          <a:xfrm>
+            <a:off x="7930464" y="91440"/>
+            <a:ext cx="27432" cy="274320"/>
+          </a:xfrm>
+          <a:prstGeom prst="rect">
+            <a:avLst/>
+          </a:prstGeom>
+          <a:solidFill>
+            <a:srgbClr val="B45309"/>
+          </a:solidFill>
+          <a:ln w="12700">
+            <a:solidFill>
+              <a:srgbClr val="B45309"/>
+            </a:solidFill>
+            <a:prstDash val="solid"/>
+          </a:ln>
+        </p:spPr>
+      </p:sp>
+      <p:pic>
+        <p:nvPicPr>
+          <p:cNvPr id="20" name="Image 0" descr="preencoded.png">    </p:cNvPr>
+          <p:cNvPicPr>
+            <a:picLocks noChangeAspect="1"/>
+          </p:cNvPicPr>
+          <p:nvPr/>
+        </p:nvPicPr>
+        <p:blipFill>
+          <a:blip r:embed="rId1"/>
+          <a:stretch>
+            <a:fillRect/>
+          </a:stretch>
+        </p:blipFill>
+        <p:spPr>
+          <a:xfrm>
+            <a:off x="8003616" y="128016"/>
+            <a:ext cx="201168" cy="201168"/>
+          </a:xfrm>
+          <a:prstGeom prst="rect">
+            <a:avLst/>
+          </a:prstGeom>
+        </p:spPr>
+      </p:pic>
+      <p:sp>
+        <p:nvSpPr>
+          <p:cNvPr id="21" name="Text 18"/>
+          <p:cNvSpPr txBox="1"/>
+          <p:nvPr/>
+        </p:nvSpPr>
+        <p:spPr>
+          <a:xfrm>
+            <a:off x="8259648" y="91440"/>
+            <a:ext cx="3346831" cy="274320"/>
+          </a:xfrm>
+          <a:prstGeom prst="rect">
+            <a:avLst/>
+          </a:prstGeom>
+          <a:noFill/>
+          <a:ln/>
+        </p:spPr>
+        <p:txBody>
+          <a:bodyPr wrap="square" lIns="0" tIns="0" rIns="0" bIns="0" rtlCol="0" anchor="ctr"/>
+          <a:lstStyle/>
+          <a:p>
+            <a:pPr indent="0" marL="0">
+              <a:buNone/>
+            </a:pPr>
+            <a:r>
+              <a:rPr lang="en-US" sz="1100" b="1" dirty="0">
+                <a:solidFill>
+                  <a:srgbClr val="92400E"/>
+                </a:solidFill>
+                <a:latin typeface="Calibri" pitchFamily="34" charset="0"/>
+                <a:ea typeface="Calibri" pitchFamily="34" charset="-122"/>
+                <a:cs typeface="Calibri" pitchFamily="34" charset="-120"/>
+              </a:rPr>
+              <a:t>DA UTILIZZARE OGGI</a:t>
+            </a:r>
+            <a:pPr indent="0" marL="0">
+              <a:buNone/>
+            </a:pPr>
+            <a:r>
+              <a:rPr lang="en-US" sz="1100" dirty="0">
+                <a:solidFill>
+                  <a:srgbClr val="92400E"/>
+                </a:solidFill>
+                <a:latin typeface="Calibri" pitchFamily="34" charset="0"/>
+                <a:ea typeface="Calibri" pitchFamily="34" charset="-122"/>
+                <a:cs typeface="Calibri" pitchFamily="34" charset="-120"/>
+              </a:rPr>
+              <a:t> · gli strumenti di PRG32</a:t>
+            </a:r>
+            <a:endParaRPr lang="en-US" sz="1100" dirty="0"/>
+          </a:p>
+        </p:txBody>
+      </p:sp>
+      <p:sp>
+        <p:nvSpPr>
           <p:cNvPr id="25" name="Slide Number Placeholder 0"/>
           <p:cNvSpPr>
             <a:spLocks noGrp="1"/>
@@ -15801,6 +18940,158 @@
       </p:sp>
       <p:sp>
         <p:nvSpPr>
+          <p:cNvPr id="17" name="Shape 15"/>
+          <p:cNvSpPr/>
+          <p:nvPr/>
+        </p:nvSpPr>
+        <p:spPr>
+          <a:xfrm>
+            <a:off x="7875600" y="91440"/>
+            <a:ext cx="3767455" cy="274320"/>
+          </a:xfrm>
+          <a:prstGeom prst="rect">
+            <a:avLst/>
+          </a:prstGeom>
+          <a:solidFill>
+            <a:srgbClr val="FEF3C7"/>
+          </a:solidFill>
+          <a:ln w="12700">
+            <a:solidFill>
+              <a:srgbClr val="B45309"/>
+            </a:solidFill>
+            <a:prstDash val="solid"/>
+          </a:ln>
+        </p:spPr>
+      </p:sp>
+      <p:sp>
+        <p:nvSpPr>
+          <p:cNvPr id="18" name="Shape 16"/>
+          <p:cNvSpPr/>
+          <p:nvPr/>
+        </p:nvSpPr>
+        <p:spPr>
+          <a:xfrm>
+            <a:off x="7875600" y="91440"/>
+            <a:ext cx="27432" cy="274320"/>
+          </a:xfrm>
+          <a:prstGeom prst="rect">
+            <a:avLst/>
+          </a:prstGeom>
+          <a:solidFill>
+            <a:srgbClr val="B45309"/>
+          </a:solidFill>
+          <a:ln w="12700">
+            <a:solidFill>
+              <a:srgbClr val="B45309"/>
+            </a:solidFill>
+            <a:prstDash val="solid"/>
+          </a:ln>
+        </p:spPr>
+      </p:sp>
+      <p:sp>
+        <p:nvSpPr>
+          <p:cNvPr id="19" name="Shape 17"/>
+          <p:cNvSpPr/>
+          <p:nvPr/>
+        </p:nvSpPr>
+        <p:spPr>
+          <a:xfrm>
+            <a:off x="7930464" y="91440"/>
+            <a:ext cx="27432" cy="274320"/>
+          </a:xfrm>
+          <a:prstGeom prst="rect">
+            <a:avLst/>
+          </a:prstGeom>
+          <a:solidFill>
+            <a:srgbClr val="B45309"/>
+          </a:solidFill>
+          <a:ln w="12700">
+            <a:solidFill>
+              <a:srgbClr val="B45309"/>
+            </a:solidFill>
+            <a:prstDash val="solid"/>
+          </a:ln>
+        </p:spPr>
+      </p:sp>
+      <p:pic>
+        <p:nvPicPr>
+          <p:cNvPr id="20" name="Image 0" descr="preencoded.png">    </p:cNvPr>
+          <p:cNvPicPr>
+            <a:picLocks noChangeAspect="1"/>
+          </p:cNvPicPr>
+          <p:nvPr/>
+        </p:nvPicPr>
+        <p:blipFill>
+          <a:blip r:embed="rId1"/>
+          <a:stretch>
+            <a:fillRect/>
+          </a:stretch>
+        </p:blipFill>
+        <p:spPr>
+          <a:xfrm>
+            <a:off x="8003616" y="128016"/>
+            <a:ext cx="201168" cy="201168"/>
+          </a:xfrm>
+          <a:prstGeom prst="rect">
+            <a:avLst/>
+          </a:prstGeom>
+        </p:spPr>
+      </p:pic>
+      <p:sp>
+        <p:nvSpPr>
+          <p:cNvPr id="21" name="Text 18"/>
+          <p:cNvSpPr txBox="1"/>
+          <p:nvPr/>
+        </p:nvSpPr>
+        <p:spPr>
+          <a:xfrm>
+            <a:off x="8259648" y="91440"/>
+            <a:ext cx="3346831" cy="274320"/>
+          </a:xfrm>
+          <a:prstGeom prst="rect">
+            <a:avLst/>
+          </a:prstGeom>
+          <a:noFill/>
+          <a:ln/>
+        </p:spPr>
+        <p:txBody>
+          <a:bodyPr wrap="square" lIns="0" tIns="0" rIns="0" bIns="0" rtlCol="0" anchor="ctr"/>
+          <a:lstStyle/>
+          <a:p>
+            <a:pPr indent="0" marL="0">
+              <a:buNone/>
+            </a:pPr>
+            <a:r>
+              <a:rPr lang="en-US" sz="1100" b="1" dirty="0">
+                <a:solidFill>
+                  <a:srgbClr val="92400E"/>
+                </a:solidFill>
+                <a:latin typeface="Calibri" pitchFamily="34" charset="0"/>
+                <a:ea typeface="Calibri" pitchFamily="34" charset="-122"/>
+                <a:cs typeface="Calibri" pitchFamily="34" charset="-120"/>
+              </a:rPr>
+              <a:t>DA UTILIZZARE OGGI</a:t>
+            </a:r>
+            <a:pPr indent="0" marL="0">
+              <a:buNone/>
+            </a:pPr>
+            <a:r>
+              <a:rPr lang="en-US" sz="1100" dirty="0">
+                <a:solidFill>
+                  <a:srgbClr val="92400E"/>
+                </a:solidFill>
+                <a:latin typeface="Calibri" pitchFamily="34" charset="0"/>
+                <a:ea typeface="Calibri" pitchFamily="34" charset="-122"/>
+                <a:cs typeface="Calibri" pitchFamily="34" charset="-120"/>
+              </a:rPr>
+              <a:t> · gli strumenti di PRG32</a:t>
+            </a:r>
+            <a:endParaRPr lang="en-US" sz="1100" dirty="0"/>
+          </a:p>
+        </p:txBody>
+      </p:sp>
+      <p:sp>
+        <p:nvSpPr>
           <p:cNvPr id="25" name="Slide Number Placeholder 0"/>
           <p:cNvSpPr>
             <a:spLocks noGrp="1"/>
@@ -16630,6 +19921,158 @@
                 <a:cs typeface="Calibri" pitchFamily="34" charset="-120"/>
               </a:rPr>
               <a:t>Schermo nero: confrontate il cablaggio del display con il firmware</a:t>
+            </a:r>
+            <a:endParaRPr lang="en-US" sz="1100" dirty="0"/>
+          </a:p>
+        </p:txBody>
+      </p:sp>
+      <p:sp>
+        <p:nvSpPr>
+          <p:cNvPr id="17" name="Shape 15"/>
+          <p:cNvSpPr/>
+          <p:nvPr/>
+        </p:nvSpPr>
+        <p:spPr>
+          <a:xfrm>
+            <a:off x="7875600" y="91440"/>
+            <a:ext cx="3767455" cy="274320"/>
+          </a:xfrm>
+          <a:prstGeom prst="rect">
+            <a:avLst/>
+          </a:prstGeom>
+          <a:solidFill>
+            <a:srgbClr val="FEF3C7"/>
+          </a:solidFill>
+          <a:ln w="12700">
+            <a:solidFill>
+              <a:srgbClr val="B45309"/>
+            </a:solidFill>
+            <a:prstDash val="solid"/>
+          </a:ln>
+        </p:spPr>
+      </p:sp>
+      <p:sp>
+        <p:nvSpPr>
+          <p:cNvPr id="18" name="Shape 16"/>
+          <p:cNvSpPr/>
+          <p:nvPr/>
+        </p:nvSpPr>
+        <p:spPr>
+          <a:xfrm>
+            <a:off x="7875600" y="91440"/>
+            <a:ext cx="27432" cy="274320"/>
+          </a:xfrm>
+          <a:prstGeom prst="rect">
+            <a:avLst/>
+          </a:prstGeom>
+          <a:solidFill>
+            <a:srgbClr val="B45309"/>
+          </a:solidFill>
+          <a:ln w="12700">
+            <a:solidFill>
+              <a:srgbClr val="B45309"/>
+            </a:solidFill>
+            <a:prstDash val="solid"/>
+          </a:ln>
+        </p:spPr>
+      </p:sp>
+      <p:sp>
+        <p:nvSpPr>
+          <p:cNvPr id="19" name="Shape 17"/>
+          <p:cNvSpPr/>
+          <p:nvPr/>
+        </p:nvSpPr>
+        <p:spPr>
+          <a:xfrm>
+            <a:off x="7930464" y="91440"/>
+            <a:ext cx="27432" cy="274320"/>
+          </a:xfrm>
+          <a:prstGeom prst="rect">
+            <a:avLst/>
+          </a:prstGeom>
+          <a:solidFill>
+            <a:srgbClr val="B45309"/>
+          </a:solidFill>
+          <a:ln w="12700">
+            <a:solidFill>
+              <a:srgbClr val="B45309"/>
+            </a:solidFill>
+            <a:prstDash val="solid"/>
+          </a:ln>
+        </p:spPr>
+      </p:sp>
+      <p:pic>
+        <p:nvPicPr>
+          <p:cNvPr id="20" name="Image 0" descr="preencoded.png">    </p:cNvPr>
+          <p:cNvPicPr>
+            <a:picLocks noChangeAspect="1"/>
+          </p:cNvPicPr>
+          <p:nvPr/>
+        </p:nvPicPr>
+        <p:blipFill>
+          <a:blip r:embed="rId1"/>
+          <a:stretch>
+            <a:fillRect/>
+          </a:stretch>
+        </p:blipFill>
+        <p:spPr>
+          <a:xfrm>
+            <a:off x="8003616" y="128016"/>
+            <a:ext cx="201168" cy="201168"/>
+          </a:xfrm>
+          <a:prstGeom prst="rect">
+            <a:avLst/>
+          </a:prstGeom>
+        </p:spPr>
+      </p:pic>
+      <p:sp>
+        <p:nvSpPr>
+          <p:cNvPr id="21" name="Text 18"/>
+          <p:cNvSpPr txBox="1"/>
+          <p:nvPr/>
+        </p:nvSpPr>
+        <p:spPr>
+          <a:xfrm>
+            <a:off x="8259648" y="91440"/>
+            <a:ext cx="3346831" cy="274320"/>
+          </a:xfrm>
+          <a:prstGeom prst="rect">
+            <a:avLst/>
+          </a:prstGeom>
+          <a:noFill/>
+          <a:ln/>
+        </p:spPr>
+        <p:txBody>
+          <a:bodyPr wrap="square" lIns="0" tIns="0" rIns="0" bIns="0" rtlCol="0" anchor="ctr"/>
+          <a:lstStyle/>
+          <a:p>
+            <a:pPr indent="0" marL="0">
+              <a:buNone/>
+            </a:pPr>
+            <a:r>
+              <a:rPr lang="en-US" sz="1100" b="1" dirty="0">
+                <a:solidFill>
+                  <a:srgbClr val="92400E"/>
+                </a:solidFill>
+                <a:latin typeface="Calibri" pitchFamily="34" charset="0"/>
+                <a:ea typeface="Calibri" pitchFamily="34" charset="-122"/>
+                <a:cs typeface="Calibri" pitchFamily="34" charset="-120"/>
+              </a:rPr>
+              <a:t>DA UTILIZZARE OGGI</a:t>
+            </a:r>
+            <a:pPr indent="0" marL="0">
+              <a:buNone/>
+            </a:pPr>
+            <a:r>
+              <a:rPr lang="en-US" sz="1100" dirty="0">
+                <a:solidFill>
+                  <a:srgbClr val="92400E"/>
+                </a:solidFill>
+                <a:latin typeface="Calibri" pitchFamily="34" charset="0"/>
+                <a:ea typeface="Calibri" pitchFamily="34" charset="-122"/>
+                <a:cs typeface="Calibri" pitchFamily="34" charset="-120"/>
+              </a:rPr>
+              <a:t> · gli strumenti di PRG32</a:t>
             </a:r>
             <a:endParaRPr lang="en-US" sz="1100" dirty="0"/>
           </a:p>
@@ -18018,6 +21461,158 @@
       </p:graphicFrame>
       <p:sp>
         <p:nvSpPr>
+          <p:cNvPr id="4" name="Shape 1"/>
+          <p:cNvSpPr/>
+          <p:nvPr/>
+        </p:nvSpPr>
+        <p:spPr>
+          <a:xfrm>
+            <a:off x="7875600" y="91440"/>
+            <a:ext cx="3767455" cy="274320"/>
+          </a:xfrm>
+          <a:prstGeom prst="rect">
+            <a:avLst/>
+          </a:prstGeom>
+          <a:solidFill>
+            <a:srgbClr val="FEF3C7"/>
+          </a:solidFill>
+          <a:ln w="12700">
+            <a:solidFill>
+              <a:srgbClr val="B45309"/>
+            </a:solidFill>
+            <a:prstDash val="solid"/>
+          </a:ln>
+        </p:spPr>
+      </p:sp>
+      <p:sp>
+        <p:nvSpPr>
+          <p:cNvPr id="5" name="Shape 2"/>
+          <p:cNvSpPr/>
+          <p:nvPr/>
+        </p:nvSpPr>
+        <p:spPr>
+          <a:xfrm>
+            <a:off x="7875600" y="91440"/>
+            <a:ext cx="27432" cy="274320"/>
+          </a:xfrm>
+          <a:prstGeom prst="rect">
+            <a:avLst/>
+          </a:prstGeom>
+          <a:solidFill>
+            <a:srgbClr val="B45309"/>
+          </a:solidFill>
+          <a:ln w="12700">
+            <a:solidFill>
+              <a:srgbClr val="B45309"/>
+            </a:solidFill>
+            <a:prstDash val="solid"/>
+          </a:ln>
+        </p:spPr>
+      </p:sp>
+      <p:sp>
+        <p:nvSpPr>
+          <p:cNvPr id="6" name="Shape 3"/>
+          <p:cNvSpPr/>
+          <p:nvPr/>
+        </p:nvSpPr>
+        <p:spPr>
+          <a:xfrm>
+            <a:off x="7930464" y="91440"/>
+            <a:ext cx="27432" cy="274320"/>
+          </a:xfrm>
+          <a:prstGeom prst="rect">
+            <a:avLst/>
+          </a:prstGeom>
+          <a:solidFill>
+            <a:srgbClr val="B45309"/>
+          </a:solidFill>
+          <a:ln w="12700">
+            <a:solidFill>
+              <a:srgbClr val="B45309"/>
+            </a:solidFill>
+            <a:prstDash val="solid"/>
+          </a:ln>
+        </p:spPr>
+      </p:sp>
+      <p:pic>
+        <p:nvPicPr>
+          <p:cNvPr id="7" name="Image 0" descr="preencoded.png">    </p:cNvPr>
+          <p:cNvPicPr>
+            <a:picLocks noChangeAspect="1"/>
+          </p:cNvPicPr>
+          <p:nvPr/>
+        </p:nvPicPr>
+        <p:blipFill>
+          <a:blip r:embed="rId1"/>
+          <a:stretch>
+            <a:fillRect/>
+          </a:stretch>
+        </p:blipFill>
+        <p:spPr>
+          <a:xfrm>
+            <a:off x="8003616" y="128016"/>
+            <a:ext cx="201168" cy="201168"/>
+          </a:xfrm>
+          <a:prstGeom prst="rect">
+            <a:avLst/>
+          </a:prstGeom>
+        </p:spPr>
+      </p:pic>
+      <p:sp>
+        <p:nvSpPr>
+          <p:cNvPr id="8" name="Text 4"/>
+          <p:cNvSpPr txBox="1"/>
+          <p:nvPr/>
+        </p:nvSpPr>
+        <p:spPr>
+          <a:xfrm>
+            <a:off x="8259648" y="91440"/>
+            <a:ext cx="3346831" cy="274320"/>
+          </a:xfrm>
+          <a:prstGeom prst="rect">
+            <a:avLst/>
+          </a:prstGeom>
+          <a:noFill/>
+          <a:ln/>
+        </p:spPr>
+        <p:txBody>
+          <a:bodyPr wrap="square" lIns="0" tIns="0" rIns="0" bIns="0" rtlCol="0" anchor="ctr"/>
+          <a:lstStyle/>
+          <a:p>
+            <a:pPr indent="0" marL="0">
+              <a:buNone/>
+            </a:pPr>
+            <a:r>
+              <a:rPr lang="en-US" sz="1100" b="1" dirty="0">
+                <a:solidFill>
+                  <a:srgbClr val="92400E"/>
+                </a:solidFill>
+                <a:latin typeface="Calibri" pitchFamily="34" charset="0"/>
+                <a:ea typeface="Calibri" pitchFamily="34" charset="-122"/>
+                <a:cs typeface="Calibri" pitchFamily="34" charset="-120"/>
+              </a:rPr>
+              <a:t>DA UTILIZZARE OGGI</a:t>
+            </a:r>
+            <a:pPr indent="0" marL="0">
+              <a:buNone/>
+            </a:pPr>
+            <a:r>
+              <a:rPr lang="en-US" sz="1100" dirty="0">
+                <a:solidFill>
+                  <a:srgbClr val="92400E"/>
+                </a:solidFill>
+                <a:latin typeface="Calibri" pitchFamily="34" charset="0"/>
+                <a:ea typeface="Calibri" pitchFamily="34" charset="-122"/>
+                <a:cs typeface="Calibri" pitchFamily="34" charset="-120"/>
+              </a:rPr>
+              <a:t> · gli strumenti di PRG32</a:t>
+            </a:r>
+            <a:endParaRPr lang="en-US" sz="1100" dirty="0"/>
+          </a:p>
+        </p:txBody>
+      </p:sp>
+      <p:sp>
+        <p:nvSpPr>
           <p:cNvPr id="25" name="Slide Number Placeholder 0"/>
           <p:cNvSpPr>
             <a:spLocks noGrp="1"/>
@@ -20149,6 +23744,158 @@
       </p:sp>
       <p:sp>
         <p:nvSpPr>
+          <p:cNvPr id="5" name="Shape 2"/>
+          <p:cNvSpPr/>
+          <p:nvPr/>
+        </p:nvSpPr>
+        <p:spPr>
+          <a:xfrm>
+            <a:off x="7875600" y="91440"/>
+            <a:ext cx="3767455" cy="274320"/>
+          </a:xfrm>
+          <a:prstGeom prst="rect">
+            <a:avLst/>
+          </a:prstGeom>
+          <a:solidFill>
+            <a:srgbClr val="FEF3C7"/>
+          </a:solidFill>
+          <a:ln w="12700">
+            <a:solidFill>
+              <a:srgbClr val="B45309"/>
+            </a:solidFill>
+            <a:prstDash val="solid"/>
+          </a:ln>
+        </p:spPr>
+      </p:sp>
+      <p:sp>
+        <p:nvSpPr>
+          <p:cNvPr id="6" name="Shape 3"/>
+          <p:cNvSpPr/>
+          <p:nvPr/>
+        </p:nvSpPr>
+        <p:spPr>
+          <a:xfrm>
+            <a:off x="7875600" y="91440"/>
+            <a:ext cx="27432" cy="274320"/>
+          </a:xfrm>
+          <a:prstGeom prst="rect">
+            <a:avLst/>
+          </a:prstGeom>
+          <a:solidFill>
+            <a:srgbClr val="B45309"/>
+          </a:solidFill>
+          <a:ln w="12700">
+            <a:solidFill>
+              <a:srgbClr val="B45309"/>
+            </a:solidFill>
+            <a:prstDash val="solid"/>
+          </a:ln>
+        </p:spPr>
+      </p:sp>
+      <p:sp>
+        <p:nvSpPr>
+          <p:cNvPr id="7" name="Shape 4"/>
+          <p:cNvSpPr/>
+          <p:nvPr/>
+        </p:nvSpPr>
+        <p:spPr>
+          <a:xfrm>
+            <a:off x="7930464" y="91440"/>
+            <a:ext cx="27432" cy="274320"/>
+          </a:xfrm>
+          <a:prstGeom prst="rect">
+            <a:avLst/>
+          </a:prstGeom>
+          <a:solidFill>
+            <a:srgbClr val="B45309"/>
+          </a:solidFill>
+          <a:ln w="12700">
+            <a:solidFill>
+              <a:srgbClr val="B45309"/>
+            </a:solidFill>
+            <a:prstDash val="solid"/>
+          </a:ln>
+        </p:spPr>
+      </p:sp>
+      <p:pic>
+        <p:nvPicPr>
+          <p:cNvPr id="8" name="Image 0" descr="preencoded.png">    </p:cNvPr>
+          <p:cNvPicPr>
+            <a:picLocks noChangeAspect="1"/>
+          </p:cNvPicPr>
+          <p:nvPr/>
+        </p:nvPicPr>
+        <p:blipFill>
+          <a:blip r:embed="rId1"/>
+          <a:stretch>
+            <a:fillRect/>
+          </a:stretch>
+        </p:blipFill>
+        <p:spPr>
+          <a:xfrm>
+            <a:off x="8003616" y="128016"/>
+            <a:ext cx="201168" cy="201168"/>
+          </a:xfrm>
+          <a:prstGeom prst="rect">
+            <a:avLst/>
+          </a:prstGeom>
+        </p:spPr>
+      </p:pic>
+      <p:sp>
+        <p:nvSpPr>
+          <p:cNvPr id="9" name="Text 5"/>
+          <p:cNvSpPr txBox="1"/>
+          <p:nvPr/>
+        </p:nvSpPr>
+        <p:spPr>
+          <a:xfrm>
+            <a:off x="8259648" y="91440"/>
+            <a:ext cx="3346831" cy="274320"/>
+          </a:xfrm>
+          <a:prstGeom prst="rect">
+            <a:avLst/>
+          </a:prstGeom>
+          <a:noFill/>
+          <a:ln/>
+        </p:spPr>
+        <p:txBody>
+          <a:bodyPr wrap="square" lIns="0" tIns="0" rIns="0" bIns="0" rtlCol="0" anchor="ctr"/>
+          <a:lstStyle/>
+          <a:p>
+            <a:pPr indent="0" marL="0">
+              <a:buNone/>
+            </a:pPr>
+            <a:r>
+              <a:rPr lang="en-US" sz="1100" b="1" dirty="0">
+                <a:solidFill>
+                  <a:srgbClr val="92400E"/>
+                </a:solidFill>
+                <a:latin typeface="Calibri" pitchFamily="34" charset="0"/>
+                <a:ea typeface="Calibri" pitchFamily="34" charset="-122"/>
+                <a:cs typeface="Calibri" pitchFamily="34" charset="-120"/>
+              </a:rPr>
+              <a:t>DA UTILIZZARE OGGI</a:t>
+            </a:r>
+            <a:pPr indent="0" marL="0">
+              <a:buNone/>
+            </a:pPr>
+            <a:r>
+              <a:rPr lang="en-US" sz="1100" dirty="0">
+                <a:solidFill>
+                  <a:srgbClr val="92400E"/>
+                </a:solidFill>
+                <a:latin typeface="Calibri" pitchFamily="34" charset="0"/>
+                <a:ea typeface="Calibri" pitchFamily="34" charset="-122"/>
+                <a:cs typeface="Calibri" pitchFamily="34" charset="-120"/>
+              </a:rPr>
+              <a:t> · gli strumenti di PRG32</a:t>
+            </a:r>
+            <a:endParaRPr lang="en-US" sz="1100" dirty="0"/>
+          </a:p>
+        </p:txBody>
+      </p:sp>
+      <p:sp>
+        <p:nvSpPr>
           <p:cNvPr id="25" name="Slide Number Placeholder 0"/>
           <p:cNvSpPr>
             <a:spLocks noGrp="1"/>
@@ -20946,6 +24693,158 @@
       </p:sp>
       <p:sp>
         <p:nvSpPr>
+          <p:cNvPr id="22" name="Shape 20"/>
+          <p:cNvSpPr/>
+          <p:nvPr/>
+        </p:nvSpPr>
+        <p:spPr>
+          <a:xfrm>
+            <a:off x="7875600" y="91440"/>
+            <a:ext cx="3767455" cy="274320"/>
+          </a:xfrm>
+          <a:prstGeom prst="rect">
+            <a:avLst/>
+          </a:prstGeom>
+          <a:solidFill>
+            <a:srgbClr val="FEF3C7"/>
+          </a:solidFill>
+          <a:ln w="12700">
+            <a:solidFill>
+              <a:srgbClr val="B45309"/>
+            </a:solidFill>
+            <a:prstDash val="solid"/>
+          </a:ln>
+        </p:spPr>
+      </p:sp>
+      <p:sp>
+        <p:nvSpPr>
+          <p:cNvPr id="23" name="Shape 21"/>
+          <p:cNvSpPr/>
+          <p:nvPr/>
+        </p:nvSpPr>
+        <p:spPr>
+          <a:xfrm>
+            <a:off x="7875600" y="91440"/>
+            <a:ext cx="27432" cy="274320"/>
+          </a:xfrm>
+          <a:prstGeom prst="rect">
+            <a:avLst/>
+          </a:prstGeom>
+          <a:solidFill>
+            <a:srgbClr val="B45309"/>
+          </a:solidFill>
+          <a:ln w="12700">
+            <a:solidFill>
+              <a:srgbClr val="B45309"/>
+            </a:solidFill>
+            <a:prstDash val="solid"/>
+          </a:ln>
+        </p:spPr>
+      </p:sp>
+      <p:sp>
+        <p:nvSpPr>
+          <p:cNvPr id="24" name="Shape 22"/>
+          <p:cNvSpPr/>
+          <p:nvPr/>
+        </p:nvSpPr>
+        <p:spPr>
+          <a:xfrm>
+            <a:off x="7930464" y="91440"/>
+            <a:ext cx="27432" cy="274320"/>
+          </a:xfrm>
+          <a:prstGeom prst="rect">
+            <a:avLst/>
+          </a:prstGeom>
+          <a:solidFill>
+            <a:srgbClr val="B45309"/>
+          </a:solidFill>
+          <a:ln w="12700">
+            <a:solidFill>
+              <a:srgbClr val="B45309"/>
+            </a:solidFill>
+            <a:prstDash val="solid"/>
+          </a:ln>
+        </p:spPr>
+      </p:sp>
+      <p:pic>
+        <p:nvPicPr>
+          <p:cNvPr id="25" name="Image 0" descr="preencoded.png">    </p:cNvPr>
+          <p:cNvPicPr>
+            <a:picLocks noChangeAspect="1"/>
+          </p:cNvPicPr>
+          <p:nvPr/>
+        </p:nvPicPr>
+        <p:blipFill>
+          <a:blip r:embed="rId1"/>
+          <a:stretch>
+            <a:fillRect/>
+          </a:stretch>
+        </p:blipFill>
+        <p:spPr>
+          <a:xfrm>
+            <a:off x="8003616" y="128016"/>
+            <a:ext cx="201168" cy="201168"/>
+          </a:xfrm>
+          <a:prstGeom prst="rect">
+            <a:avLst/>
+          </a:prstGeom>
+        </p:spPr>
+      </p:pic>
+      <p:sp>
+        <p:nvSpPr>
+          <p:cNvPr id="26" name="Text 23"/>
+          <p:cNvSpPr txBox="1"/>
+          <p:nvPr/>
+        </p:nvSpPr>
+        <p:spPr>
+          <a:xfrm>
+            <a:off x="8259648" y="91440"/>
+            <a:ext cx="3346831" cy="274320"/>
+          </a:xfrm>
+          <a:prstGeom prst="rect">
+            <a:avLst/>
+          </a:prstGeom>
+          <a:noFill/>
+          <a:ln/>
+        </p:spPr>
+        <p:txBody>
+          <a:bodyPr wrap="square" lIns="0" tIns="0" rIns="0" bIns="0" rtlCol="0" anchor="ctr"/>
+          <a:lstStyle/>
+          <a:p>
+            <a:pPr indent="0" marL="0">
+              <a:buNone/>
+            </a:pPr>
+            <a:r>
+              <a:rPr lang="en-US" sz="1100" b="1" dirty="0">
+                <a:solidFill>
+                  <a:srgbClr val="92400E"/>
+                </a:solidFill>
+                <a:latin typeface="Calibri" pitchFamily="34" charset="0"/>
+                <a:ea typeface="Calibri" pitchFamily="34" charset="-122"/>
+                <a:cs typeface="Calibri" pitchFamily="34" charset="-120"/>
+              </a:rPr>
+              <a:t>DA UTILIZZARE OGGI</a:t>
+            </a:r>
+            <a:pPr indent="0" marL="0">
+              <a:buNone/>
+            </a:pPr>
+            <a:r>
+              <a:rPr lang="en-US" sz="1100" dirty="0">
+                <a:solidFill>
+                  <a:srgbClr val="92400E"/>
+                </a:solidFill>
+                <a:latin typeface="Calibri" pitchFamily="34" charset="0"/>
+                <a:ea typeface="Calibri" pitchFamily="34" charset="-122"/>
+                <a:cs typeface="Calibri" pitchFamily="34" charset="-120"/>
+              </a:rPr>
+              <a:t> · gli strumenti di PRG32</a:t>
+            </a:r>
+            <a:endParaRPr lang="en-US" sz="1100" dirty="0"/>
+          </a:p>
+        </p:txBody>
+      </p:sp>
+      <p:sp>
+        <p:nvSpPr>
           <p:cNvPr id="25" name="Slide Number Placeholder 0"/>
           <p:cNvSpPr>
             <a:spLocks noGrp="1"/>
@@ -21743,6 +25642,158 @@
       </p:sp>
       <p:sp>
         <p:nvSpPr>
+          <p:cNvPr id="22" name="Shape 20"/>
+          <p:cNvSpPr/>
+          <p:nvPr/>
+        </p:nvSpPr>
+        <p:spPr>
+          <a:xfrm>
+            <a:off x="7875600" y="91440"/>
+            <a:ext cx="3767455" cy="274320"/>
+          </a:xfrm>
+          <a:prstGeom prst="rect">
+            <a:avLst/>
+          </a:prstGeom>
+          <a:solidFill>
+            <a:srgbClr val="FEF3C7"/>
+          </a:solidFill>
+          <a:ln w="12700">
+            <a:solidFill>
+              <a:srgbClr val="B45309"/>
+            </a:solidFill>
+            <a:prstDash val="solid"/>
+          </a:ln>
+        </p:spPr>
+      </p:sp>
+      <p:sp>
+        <p:nvSpPr>
+          <p:cNvPr id="23" name="Shape 21"/>
+          <p:cNvSpPr/>
+          <p:nvPr/>
+        </p:nvSpPr>
+        <p:spPr>
+          <a:xfrm>
+            <a:off x="7875600" y="91440"/>
+            <a:ext cx="27432" cy="274320"/>
+          </a:xfrm>
+          <a:prstGeom prst="rect">
+            <a:avLst/>
+          </a:prstGeom>
+          <a:solidFill>
+            <a:srgbClr val="B45309"/>
+          </a:solidFill>
+          <a:ln w="12700">
+            <a:solidFill>
+              <a:srgbClr val="B45309"/>
+            </a:solidFill>
+            <a:prstDash val="solid"/>
+          </a:ln>
+        </p:spPr>
+      </p:sp>
+      <p:sp>
+        <p:nvSpPr>
+          <p:cNvPr id="24" name="Shape 22"/>
+          <p:cNvSpPr/>
+          <p:nvPr/>
+        </p:nvSpPr>
+        <p:spPr>
+          <a:xfrm>
+            <a:off x="7930464" y="91440"/>
+            <a:ext cx="27432" cy="274320"/>
+          </a:xfrm>
+          <a:prstGeom prst="rect">
+            <a:avLst/>
+          </a:prstGeom>
+          <a:solidFill>
+            <a:srgbClr val="B45309"/>
+          </a:solidFill>
+          <a:ln w="12700">
+            <a:solidFill>
+              <a:srgbClr val="B45309"/>
+            </a:solidFill>
+            <a:prstDash val="solid"/>
+          </a:ln>
+        </p:spPr>
+      </p:sp>
+      <p:pic>
+        <p:nvPicPr>
+          <p:cNvPr id="25" name="Image 0" descr="preencoded.png">    </p:cNvPr>
+          <p:cNvPicPr>
+            <a:picLocks noChangeAspect="1"/>
+          </p:cNvPicPr>
+          <p:nvPr/>
+        </p:nvPicPr>
+        <p:blipFill>
+          <a:blip r:embed="rId1"/>
+          <a:stretch>
+            <a:fillRect/>
+          </a:stretch>
+        </p:blipFill>
+        <p:spPr>
+          <a:xfrm>
+            <a:off x="8003616" y="128016"/>
+            <a:ext cx="201168" cy="201168"/>
+          </a:xfrm>
+          <a:prstGeom prst="rect">
+            <a:avLst/>
+          </a:prstGeom>
+        </p:spPr>
+      </p:pic>
+      <p:sp>
+        <p:nvSpPr>
+          <p:cNvPr id="26" name="Text 23"/>
+          <p:cNvSpPr txBox="1"/>
+          <p:nvPr/>
+        </p:nvSpPr>
+        <p:spPr>
+          <a:xfrm>
+            <a:off x="8259648" y="91440"/>
+            <a:ext cx="3346831" cy="274320"/>
+          </a:xfrm>
+          <a:prstGeom prst="rect">
+            <a:avLst/>
+          </a:prstGeom>
+          <a:noFill/>
+          <a:ln/>
+        </p:spPr>
+        <p:txBody>
+          <a:bodyPr wrap="square" lIns="0" tIns="0" rIns="0" bIns="0" rtlCol="0" anchor="ctr"/>
+          <a:lstStyle/>
+          <a:p>
+            <a:pPr indent="0" marL="0">
+              <a:buNone/>
+            </a:pPr>
+            <a:r>
+              <a:rPr lang="en-US" sz="1100" b="1" dirty="0">
+                <a:solidFill>
+                  <a:srgbClr val="92400E"/>
+                </a:solidFill>
+                <a:latin typeface="Calibri" pitchFamily="34" charset="0"/>
+                <a:ea typeface="Calibri" pitchFamily="34" charset="-122"/>
+                <a:cs typeface="Calibri" pitchFamily="34" charset="-120"/>
+              </a:rPr>
+              <a:t>DA UTILIZZARE OGGI</a:t>
+            </a:r>
+            <a:pPr indent="0" marL="0">
+              <a:buNone/>
+            </a:pPr>
+            <a:r>
+              <a:rPr lang="en-US" sz="1100" dirty="0">
+                <a:solidFill>
+                  <a:srgbClr val="92400E"/>
+                </a:solidFill>
+                <a:latin typeface="Calibri" pitchFamily="34" charset="0"/>
+                <a:ea typeface="Calibri" pitchFamily="34" charset="-122"/>
+                <a:cs typeface="Calibri" pitchFamily="34" charset="-120"/>
+              </a:rPr>
+              <a:t> · gli strumenti di PRG32</a:t>
+            </a:r>
+            <a:endParaRPr lang="en-US" sz="1100" dirty="0"/>
+          </a:p>
+        </p:txBody>
+      </p:sp>
+      <p:sp>
+        <p:nvSpPr>
           <p:cNvPr id="25" name="Slide Number Placeholder 0"/>
           <p:cNvSpPr>
             <a:spLocks noGrp="1"/>
@@ -22545,6 +26596,158 @@
       </p:sp>
       <p:sp>
         <p:nvSpPr>
+          <p:cNvPr id="17" name="Shape 15"/>
+          <p:cNvSpPr/>
+          <p:nvPr/>
+        </p:nvSpPr>
+        <p:spPr>
+          <a:xfrm>
+            <a:off x="7875600" y="91440"/>
+            <a:ext cx="3767455" cy="274320"/>
+          </a:xfrm>
+          <a:prstGeom prst="rect">
+            <a:avLst/>
+          </a:prstGeom>
+          <a:solidFill>
+            <a:srgbClr val="FEF3C7"/>
+          </a:solidFill>
+          <a:ln w="12700">
+            <a:solidFill>
+              <a:srgbClr val="B45309"/>
+            </a:solidFill>
+            <a:prstDash val="solid"/>
+          </a:ln>
+        </p:spPr>
+      </p:sp>
+      <p:sp>
+        <p:nvSpPr>
+          <p:cNvPr id="18" name="Shape 16"/>
+          <p:cNvSpPr/>
+          <p:nvPr/>
+        </p:nvSpPr>
+        <p:spPr>
+          <a:xfrm>
+            <a:off x="7875600" y="91440"/>
+            <a:ext cx="27432" cy="274320"/>
+          </a:xfrm>
+          <a:prstGeom prst="rect">
+            <a:avLst/>
+          </a:prstGeom>
+          <a:solidFill>
+            <a:srgbClr val="B45309"/>
+          </a:solidFill>
+          <a:ln w="12700">
+            <a:solidFill>
+              <a:srgbClr val="B45309"/>
+            </a:solidFill>
+            <a:prstDash val="solid"/>
+          </a:ln>
+        </p:spPr>
+      </p:sp>
+      <p:sp>
+        <p:nvSpPr>
+          <p:cNvPr id="19" name="Shape 17"/>
+          <p:cNvSpPr/>
+          <p:nvPr/>
+        </p:nvSpPr>
+        <p:spPr>
+          <a:xfrm>
+            <a:off x="7930464" y="91440"/>
+            <a:ext cx="27432" cy="274320"/>
+          </a:xfrm>
+          <a:prstGeom prst="rect">
+            <a:avLst/>
+          </a:prstGeom>
+          <a:solidFill>
+            <a:srgbClr val="B45309"/>
+          </a:solidFill>
+          <a:ln w="12700">
+            <a:solidFill>
+              <a:srgbClr val="B45309"/>
+            </a:solidFill>
+            <a:prstDash val="solid"/>
+          </a:ln>
+        </p:spPr>
+      </p:sp>
+      <p:pic>
+        <p:nvPicPr>
+          <p:cNvPr id="20" name="Image 0" descr="preencoded.png">    </p:cNvPr>
+          <p:cNvPicPr>
+            <a:picLocks noChangeAspect="1"/>
+          </p:cNvPicPr>
+          <p:nvPr/>
+        </p:nvPicPr>
+        <p:blipFill>
+          <a:blip r:embed="rId1"/>
+          <a:stretch>
+            <a:fillRect/>
+          </a:stretch>
+        </p:blipFill>
+        <p:spPr>
+          <a:xfrm>
+            <a:off x="8003616" y="128016"/>
+            <a:ext cx="201168" cy="201168"/>
+          </a:xfrm>
+          <a:prstGeom prst="rect">
+            <a:avLst/>
+          </a:prstGeom>
+        </p:spPr>
+      </p:pic>
+      <p:sp>
+        <p:nvSpPr>
+          <p:cNvPr id="21" name="Text 18"/>
+          <p:cNvSpPr txBox="1"/>
+          <p:nvPr/>
+        </p:nvSpPr>
+        <p:spPr>
+          <a:xfrm>
+            <a:off x="8259648" y="91440"/>
+            <a:ext cx="3346831" cy="274320"/>
+          </a:xfrm>
+          <a:prstGeom prst="rect">
+            <a:avLst/>
+          </a:prstGeom>
+          <a:noFill/>
+          <a:ln/>
+        </p:spPr>
+        <p:txBody>
+          <a:bodyPr wrap="square" lIns="0" tIns="0" rIns="0" bIns="0" rtlCol="0" anchor="ctr"/>
+          <a:lstStyle/>
+          <a:p>
+            <a:pPr indent="0" marL="0">
+              <a:buNone/>
+            </a:pPr>
+            <a:r>
+              <a:rPr lang="en-US" sz="1100" b="1" dirty="0">
+                <a:solidFill>
+                  <a:srgbClr val="92400E"/>
+                </a:solidFill>
+                <a:latin typeface="Calibri" pitchFamily="34" charset="0"/>
+                <a:ea typeface="Calibri" pitchFamily="34" charset="-122"/>
+                <a:cs typeface="Calibri" pitchFamily="34" charset="-120"/>
+              </a:rPr>
+              <a:t>DA UTILIZZARE OGGI</a:t>
+            </a:r>
+            <a:pPr indent="0" marL="0">
+              <a:buNone/>
+            </a:pPr>
+            <a:r>
+              <a:rPr lang="en-US" sz="1100" dirty="0">
+                <a:solidFill>
+                  <a:srgbClr val="92400E"/>
+                </a:solidFill>
+                <a:latin typeface="Calibri" pitchFamily="34" charset="0"/>
+                <a:ea typeface="Calibri" pitchFamily="34" charset="-122"/>
+                <a:cs typeface="Calibri" pitchFamily="34" charset="-120"/>
+              </a:rPr>
+              <a:t> · gli strumenti di PRG32</a:t>
+            </a:r>
+            <a:endParaRPr lang="en-US" sz="1100" dirty="0"/>
+          </a:p>
+        </p:txBody>
+      </p:sp>
+      <p:sp>
+        <p:nvSpPr>
           <p:cNvPr id="25" name="Slide Number Placeholder 0"/>
           <p:cNvSpPr>
             <a:spLocks noGrp="1"/>
@@ -24510,6 +28713,158 @@
               <a:t>doctor controlla l'installazione: si vedano le prossime slide</a:t>
             </a:r>
             <a:endParaRPr lang="en-US" sz="1200" dirty="0"/>
+          </a:p>
+        </p:txBody>
+      </p:sp>
+      <p:sp>
+        <p:nvSpPr>
+          <p:cNvPr id="17" name="Shape 15"/>
+          <p:cNvSpPr/>
+          <p:nvPr/>
+        </p:nvSpPr>
+        <p:spPr>
+          <a:xfrm>
+            <a:off x="7875600" y="91440"/>
+            <a:ext cx="3767455" cy="274320"/>
+          </a:xfrm>
+          <a:prstGeom prst="rect">
+            <a:avLst/>
+          </a:prstGeom>
+          <a:solidFill>
+            <a:srgbClr val="FEF3C7"/>
+          </a:solidFill>
+          <a:ln w="12700">
+            <a:solidFill>
+              <a:srgbClr val="B45309"/>
+            </a:solidFill>
+            <a:prstDash val="solid"/>
+          </a:ln>
+        </p:spPr>
+      </p:sp>
+      <p:sp>
+        <p:nvSpPr>
+          <p:cNvPr id="18" name="Shape 16"/>
+          <p:cNvSpPr/>
+          <p:nvPr/>
+        </p:nvSpPr>
+        <p:spPr>
+          <a:xfrm>
+            <a:off x="7875600" y="91440"/>
+            <a:ext cx="27432" cy="274320"/>
+          </a:xfrm>
+          <a:prstGeom prst="rect">
+            <a:avLst/>
+          </a:prstGeom>
+          <a:solidFill>
+            <a:srgbClr val="B45309"/>
+          </a:solidFill>
+          <a:ln w="12700">
+            <a:solidFill>
+              <a:srgbClr val="B45309"/>
+            </a:solidFill>
+            <a:prstDash val="solid"/>
+          </a:ln>
+        </p:spPr>
+      </p:sp>
+      <p:sp>
+        <p:nvSpPr>
+          <p:cNvPr id="19" name="Shape 17"/>
+          <p:cNvSpPr/>
+          <p:nvPr/>
+        </p:nvSpPr>
+        <p:spPr>
+          <a:xfrm>
+            <a:off x="7930464" y="91440"/>
+            <a:ext cx="27432" cy="274320"/>
+          </a:xfrm>
+          <a:prstGeom prst="rect">
+            <a:avLst/>
+          </a:prstGeom>
+          <a:solidFill>
+            <a:srgbClr val="B45309"/>
+          </a:solidFill>
+          <a:ln w="12700">
+            <a:solidFill>
+              <a:srgbClr val="B45309"/>
+            </a:solidFill>
+            <a:prstDash val="solid"/>
+          </a:ln>
+        </p:spPr>
+      </p:sp>
+      <p:pic>
+        <p:nvPicPr>
+          <p:cNvPr id="20" name="Image 0" descr="preencoded.png">    </p:cNvPr>
+          <p:cNvPicPr>
+            <a:picLocks noChangeAspect="1"/>
+          </p:cNvPicPr>
+          <p:nvPr/>
+        </p:nvPicPr>
+        <p:blipFill>
+          <a:blip r:embed="rId1"/>
+          <a:stretch>
+            <a:fillRect/>
+          </a:stretch>
+        </p:blipFill>
+        <p:spPr>
+          <a:xfrm>
+            <a:off x="8003616" y="128016"/>
+            <a:ext cx="201168" cy="201168"/>
+          </a:xfrm>
+          <a:prstGeom prst="rect">
+            <a:avLst/>
+          </a:prstGeom>
+        </p:spPr>
+      </p:pic>
+      <p:sp>
+        <p:nvSpPr>
+          <p:cNvPr id="21" name="Text 18"/>
+          <p:cNvSpPr txBox="1"/>
+          <p:nvPr/>
+        </p:nvSpPr>
+        <p:spPr>
+          <a:xfrm>
+            <a:off x="8259648" y="91440"/>
+            <a:ext cx="3346831" cy="274320"/>
+          </a:xfrm>
+          <a:prstGeom prst="rect">
+            <a:avLst/>
+          </a:prstGeom>
+          <a:noFill/>
+          <a:ln/>
+        </p:spPr>
+        <p:txBody>
+          <a:bodyPr wrap="square" lIns="0" tIns="0" rIns="0" bIns="0" rtlCol="0" anchor="ctr"/>
+          <a:lstStyle/>
+          <a:p>
+            <a:pPr indent="0" marL="0">
+              <a:buNone/>
+            </a:pPr>
+            <a:r>
+              <a:rPr lang="en-US" sz="1100" b="1" dirty="0">
+                <a:solidFill>
+                  <a:srgbClr val="92400E"/>
+                </a:solidFill>
+                <a:latin typeface="Calibri" pitchFamily="34" charset="0"/>
+                <a:ea typeface="Calibri" pitchFamily="34" charset="-122"/>
+                <a:cs typeface="Calibri" pitchFamily="34" charset="-120"/>
+              </a:rPr>
+              <a:t>DA UTILIZZARE OGGI</a:t>
+            </a:r>
+            <a:pPr indent="0" marL="0">
+              <a:buNone/>
+            </a:pPr>
+            <a:r>
+              <a:rPr lang="en-US" sz="1100" dirty="0">
+                <a:solidFill>
+                  <a:srgbClr val="92400E"/>
+                </a:solidFill>
+                <a:latin typeface="Calibri" pitchFamily="34" charset="0"/>
+                <a:ea typeface="Calibri" pitchFamily="34" charset="-122"/>
+                <a:cs typeface="Calibri" pitchFamily="34" charset="-120"/>
+              </a:rPr>
+              <a:t> · gli strumenti di PRG32</a:t>
+            </a:r>
+            <a:endParaRPr lang="en-US" sz="1100" dirty="0"/>
           </a:p>
         </p:txBody>
       </p:sp>

--- a/it/slides/01-Architettura_dei_Calcolatori-PRG32_e_PRG32-QT_Installazione-Codice.pptx
+++ b/it/slides/01-Architettura_dei_Calcolatori-PRG32_e_PRG32-QT_Installazione-Codice.pptx
@@ -134,13 +134,13 @@
   <p:extLst>
     <p:ext uri="{521415D9-36F7-43E2-AB2F-B90AF26B5E84}">
       <p14:sectionLst xmlns:p14="http://schemas.microsoft.com/office/powerpoint/2010/main">
-        <p14:section name="Apertura" id="{188c6a4e-5e7a-24fa-14b2-a57741a54588}">
+        <p14:section name="Apertura" id="{c453ea81-6c8e-2912-7814-11ab60a60c7c}">
           <p14:sldIdLst>
             <p14:sldId id="256"/>
             <p14:sldId id="257"/>
           </p14:sldIdLst>
         </p14:section>
-        <p14:section name="Passo 1: installare PRG32-QT" id="{e9b8a92e-c865-f205-277d-493639713d7d}">
+        <p14:section name="Passo 1: installare PRG32-QT" id="{e126a6c7-f22e-e755-5a51-9ffde990ba2b}">
           <p14:sldIdLst>
             <p14:sldId id="258"/>
             <p14:sldId id="259"/>
@@ -150,7 +150,7 @@
             <p14:sldId id="263"/>
           </p14:sldIdLst>
         </p14:section>
-        <p14:section name="Passo 2: installare la toolchain" id="{71d3371b-08c4-b698-0d1d-95e0fb19e6ce}">
+        <p14:section name="Passo 2: installare la toolchain" id="{94edf54f-1a99-d3f4-7f85-d1d57388c7d8}">
           <p14:sldIdLst>
             <p14:sldId id="264"/>
             <p14:sldId id="265"/>
@@ -159,7 +159,7 @@
             <p14:sldId id="268"/>
           </p14:sldIdLst>
         </p14:section>
-        <p14:section name="Passo 3: la prima compilazione" id="{7d2f341b-76c4-36be-d017-9769ecfeca30}">
+        <p14:section name="Passo 3: la prima compilazione" id="{a47b69f7-3e01-84c4-6c9c-ba1eaeb11c0b}">
           <p14:sldIdLst>
             <p14:sldId id="269"/>
             <p14:sldId id="270"/>
@@ -167,20 +167,20 @@
             <p14:sldId id="272"/>
           </p14:sldIdLst>
         </p14:section>
-        <p14:section name="Facoltativo: QEMU e il kit" id="{bec5aade-6fa2-9124-b00a-d49ec4edddaf}">
+        <p14:section name="Facoltativo: QEMU e il kit" id="{706dbace-3f68-0740-8a1b-afbc827638e5}">
           <p14:sldIdLst>
             <p14:sldId id="273"/>
             <p14:sldId id="274"/>
           </p14:sldIdLst>
         </p14:section>
-        <p14:section name="Il programma completo" id="{b946f346-f83f-0df4-6bde-6fe9891c2092}">
+        <p14:section name="Il programma completo" id="{89996c1d-1adf-21a9-1b02-56087ffee469}">
           <p14:sldIdLst>
             <p14:sldId id="275"/>
             <p14:sldId id="276"/>
             <p14:sldId id="277"/>
           </p14:sldIdLst>
         </p14:section>
-        <p14:section name="Eseguire e provare" id="{d55449ed-c0be-578c-a392-44da7cbe96c8}">
+        <p14:section name="Eseguire e provare" id="{9550682d-e403-1f24-3bdd-47b8bf2d0cd5}">
           <p14:sldIdLst>
             <p14:sldId id="278"/>
             <p14:sldId id="279"/>
@@ -189,7 +189,7 @@
             <p14:sldId id="282"/>
           </p14:sldIdLst>
         </p14:section>
-        <p14:section name="Esercizi" id="{487ac7ec-ae8c-97eb-580f-5776e22df470}">
+        <p14:section name="Esercizi" id="{255d6233-972f-e479-36d8-cf13039b966c}">
           <p14:sldIdLst>
             <p14:sldId id="283"/>
           </p14:sldIdLst>
